--- a/reports/MN-BO组会报告_v2.pptx
+++ b/reports/MN-BO组会报告_v2.pptx
@@ -4,6 +4,9 @@
   <p:sldMasterIdLst>
     <p:sldMasterId id="2147483648" r:id="rId1"/>
   </p:sldMasterIdLst>
+  <p:notesMasterIdLst>
+    <p:notesMasterId r:id="rId13"/>
+  </p:notesMasterIdLst>
   <p:sldIdLst>
     <p:sldId id="256" r:id="rId2"/>
     <p:sldId id="257" r:id="rId3"/>
@@ -14,12 +17,10 @@
     <p:sldId id="262" r:id="rId8"/>
     <p:sldId id="263" r:id="rId9"/>
     <p:sldId id="264" r:id="rId10"/>
-    <p:sldId id="265" r:id="rId11"/>
+    <p:sldId id="266" r:id="rId11"/>
+    <p:sldId id="265" r:id="rId12"/>
   </p:sldIdLst>
-  <p:notesMasterIdLst>
-    <p:notesMasterId r:id="rId12"/>
-  </p:notesMasterIdLst>
-  <p:sldSz cx="9144000" cy="5143500"/>
+  <p:sldSz cx="9144000" cy="5143500" type="screen16x9"/>
   <p:notesSz cx="5143500" cy="9144000"/>
   <p:defaultTextStyle>
     <a:lvl1pPr marL="0" algn="l" defTabSz="914400" rtl="0" eaLnBrk="1" latinLnBrk="0" hangingPunct="1">
@@ -113,6 +114,11 @@
       </a:defRPr>
     </a:lvl9pPr>
   </p:defaultTextStyle>
+  <p:extLst>
+    <p:ext uri="{EFAFB233-063F-42B5-8137-9DF3F51BA10A}">
+      <p15:sldGuideLst xmlns:p15="http://schemas.microsoft.com/office/powerpoint/2012/main"/>
+    </p:ext>
+  </p:extLst>
 </p:presentation>
 </file>
 
@@ -138,234 +144,10 @@
           <a:chExt cx="0" cy="0"/>
         </a:xfrm>
       </p:grpSpPr>
-      <p:sp>
-        <p:nvSpPr>
-          <p:cNvPr id="2" name="Header Placeholder 1"/>
-          <p:cNvSpPr>
-            <a:spLocks noGrp="1"/>
-          </p:cNvSpPr>
-          <p:nvPr>
-            <p:ph type="hdr" sz="quarter"/>
-          </p:nvPr>
-        </p:nvSpPr>
-        <p:spPr>
-          <a:xfrm>
-            <a:off x="0" y="0"/>
-            <a:ext cx="2971800" cy="458788"/>
-          </a:xfrm>
-          <a:prstGeom prst="rect">
-            <a:avLst/>
-          </a:prstGeom>
-        </p:spPr>
-        <p:txBody>
-          <a:bodyPr vert="horz" lIns="91440" tIns="45720" rIns="91440" bIns="45720" rtlCol="0"/>
-          <a:lstStyle>
-            <a:lvl1pPr algn="l">
-              <a:defRPr sz="1200"/>
-            </a:lvl1pPr>
-          </a:lstStyle>
-          <a:p>
-            <a:endParaRPr lang="en-US"/>
-          </a:p>
-        </p:txBody>
-      </p:sp>
-      <p:sp>
-        <p:nvSpPr>
-          <p:cNvPr id="3" name="Date Placeholder 2"/>
-          <p:cNvSpPr>
-            <a:spLocks noGrp="1"/>
-          </p:cNvSpPr>
-          <p:nvPr>
-            <p:ph type="dt" idx="1"/>
-          </p:nvPr>
-        </p:nvSpPr>
-        <p:spPr>
-          <a:xfrm>
-            <a:off x="3884613" y="0"/>
-            <a:ext cx="2971800" cy="458788"/>
-          </a:xfrm>
-          <a:prstGeom prst="rect">
-            <a:avLst/>
-          </a:prstGeom>
-        </p:spPr>
-        <p:txBody>
-          <a:bodyPr vert="horz" lIns="91440" tIns="45720" rIns="91440" bIns="45720" rtlCol="0"/>
-          <a:lstStyle>
-            <a:lvl1pPr algn="r">
-              <a:defRPr sz="1200"/>
-            </a:lvl1pPr>
-          </a:lstStyle>
-          <a:p>
-            <a:fld id="{5282F153-3F37-0F45-9E97-73ACFA13230C}" type="datetimeFigureOut">
-              <a:rPr lang="en-US"/>
-              <a:t>7/23/19</a:t>
-            </a:fld>
-            <a:endParaRPr lang="en-US"/>
-          </a:p>
-        </p:txBody>
-      </p:sp>
-      <p:sp>
-        <p:nvSpPr>
-          <p:cNvPr id="4" name="Slide Image Placeholder 3"/>
-          <p:cNvSpPr>
-            <a:spLocks noGrp="1" noRot="1" noChangeAspect="1"/>
-          </p:cNvSpPr>
-          <p:nvPr>
-            <p:ph type="sldImg" idx="2"/>
-          </p:nvPr>
-        </p:nvSpPr>
-        <p:spPr>
-          <a:xfrm>
-            <a:off x="685800" y="1143000"/>
-            <a:ext cx="5486400" cy="3086100"/>
-          </a:xfrm>
-          <a:prstGeom prst="rect">
-            <a:avLst/>
-          </a:prstGeom>
-          <a:noFill/>
-          <a:ln w="12700">
-            <a:solidFill>
-              <a:prstClr val="black"/>
-            </a:solidFill>
-          </a:ln>
-        </p:spPr>
-        <p:txBody>
-          <a:bodyPr vert="horz" lIns="91440" tIns="45720" rIns="91440" bIns="45720" rtlCol="0" anchor="ctr"/>
-          <a:lstStyle/>
-          <a:p>
-            <a:endParaRPr lang="en-US"/>
-          </a:p>
-        </p:txBody>
-      </p:sp>
-      <p:sp>
-        <p:nvSpPr>
-          <p:cNvPr id="5" name="Notes Placeholder 4"/>
-          <p:cNvSpPr>
-            <a:spLocks noGrp="1"/>
-          </p:cNvSpPr>
-          <p:nvPr>
-            <p:ph type="body" sz="quarter" idx="3"/>
-          </p:nvPr>
-        </p:nvSpPr>
-        <p:spPr>
-          <a:xfrm>
-            <a:off x="685800" y="4400550"/>
-            <a:ext cx="5486400" cy="3600450"/>
-          </a:xfrm>
-          <a:prstGeom prst="rect">
-            <a:avLst/>
-          </a:prstGeom>
-        </p:spPr>
-        <p:txBody>
-          <a:bodyPr vert="horz" lIns="91440" tIns="45720" rIns="91440" bIns="45720" rtlCol="0"/>
-          <a:lstStyle/>
-          <a:p>
-            <a:pPr lvl="0"/>
-            <a:r>
-              <a:rPr lang="en-US"/>
-              <a:t>Click to edit Master text styles</a:t>
-            </a:r>
-          </a:p>
-          <a:p>
-            <a:pPr lvl="1"/>
-            <a:r>
-              <a:rPr lang="en-US"/>
-              <a:t>Second level</a:t>
-            </a:r>
-          </a:p>
-          <a:p>
-            <a:pPr lvl="2"/>
-            <a:r>
-              <a:rPr lang="en-US"/>
-              <a:t>Third level</a:t>
-            </a:r>
-          </a:p>
-          <a:p>
-            <a:pPr lvl="3"/>
-            <a:r>
-              <a:rPr lang="en-US"/>
-              <a:t>Fourth level</a:t>
-            </a:r>
-          </a:p>
-          <a:p>
-            <a:pPr lvl="4"/>
-            <a:r>
-              <a:rPr lang="en-US"/>
-              <a:t>Fifth level</a:t>
-            </a:r>
-          </a:p>
-        </p:txBody>
-      </p:sp>
-      <p:sp>
-        <p:nvSpPr>
-          <p:cNvPr id="6" name="Footer Placeholder 5"/>
-          <p:cNvSpPr>
-            <a:spLocks noGrp="1"/>
-          </p:cNvSpPr>
-          <p:nvPr>
-            <p:ph type="ftr" sz="quarter" idx="4"/>
-          </p:nvPr>
-        </p:nvSpPr>
-        <p:spPr>
-          <a:xfrm>
-            <a:off x="0" y="8685213"/>
-            <a:ext cx="2971800" cy="458787"/>
-          </a:xfrm>
-          <a:prstGeom prst="rect">
-            <a:avLst/>
-          </a:prstGeom>
-        </p:spPr>
-        <p:txBody>
-          <a:bodyPr vert="horz" lIns="91440" tIns="45720" rIns="91440" bIns="45720" rtlCol="0" anchor="b"/>
-          <a:lstStyle>
-            <a:lvl1pPr algn="l">
-              <a:defRPr sz="1200"/>
-            </a:lvl1pPr>
-          </a:lstStyle>
-          <a:p>
-            <a:endParaRPr lang="en-US"/>
-          </a:p>
-        </p:txBody>
-      </p:sp>
-      <p:sp>
-        <p:nvSpPr>
-          <p:cNvPr id="7" name="Slide Number Placeholder 6"/>
-          <p:cNvSpPr>
-            <a:spLocks noGrp="1"/>
-          </p:cNvSpPr>
-          <p:nvPr>
-            <p:ph type="sldNum" sz="quarter" idx="5"/>
-          </p:nvPr>
-        </p:nvSpPr>
-        <p:spPr>
-          <a:xfrm>
-            <a:off x="3884613" y="8685213"/>
-            <a:ext cx="2971800" cy="458787"/>
-          </a:xfrm>
-          <a:prstGeom prst="rect">
-            <a:avLst/>
-          </a:prstGeom>
-        </p:spPr>
-        <p:txBody>
-          <a:bodyPr vert="horz" lIns="91440" tIns="45720" rIns="91440" bIns="45720" rtlCol="0" anchor="b"/>
-          <a:lstStyle>
-            <a:lvl1pPr algn="r">
-              <a:defRPr sz="1200"/>
-            </a:lvl1pPr>
-          </a:lstStyle>
-          <a:p>
-            <a:fld id="{CE5E9CC1-C706-0F49-92D6-E571CC5EEA8F}" type="slidenum">
-              <a:rPr lang="en-US"/>
-              <a:t>‹#›</a:t>
-            </a:fld>
-            <a:endParaRPr lang="en-US"/>
-          </a:p>
-        </p:txBody>
-      </p:sp>
     </p:spTree>
     <p:extLst>
       <p:ext uri="{BB962C8B-B14F-4D97-AF65-F5344CB8AC3E}">
-        <p14:creationId xmlns:p14="http://schemas.microsoft.com/office/powerpoint/2010/main" val="1024086991"/>
+        <p14:creationId xmlns:p14="http://schemas.microsoft.com/office/powerpoint/2010/main" val="3438040052"/>
       </p:ext>
     </p:extLst>
   </p:cSld>
@@ -509,10 +291,6 @@
           <a:bodyPr/>
           <a:lstStyle/>
           <a:p>
-            <a:r>
-              <a:rPr lang="en-US" dirty="0"/>
-              <a:t/>
-            </a:r>
             <a:endParaRPr lang="en-US" dirty="0"/>
           </a:p>
         </p:txBody>
@@ -597,10 +375,6 @@
           <a:bodyPr/>
           <a:lstStyle/>
           <a:p>
-            <a:r>
-              <a:rPr lang="en-US" dirty="0"/>
-              <a:t/>
-            </a:r>
             <a:endParaRPr lang="en-US" dirty="0"/>
           </a:p>
         </p:txBody>
@@ -622,7 +396,7 @@
           <a:p>
             <a:fld id="{F7021451-1387-4CA6-816F-3879F97B5CBC}" type="slidenum">
               <a:rPr lang="en-US"/>
-              <a:t>10</a:t>
+              <a:t>11</a:t>
             </a:fld>
             <a:endParaRPr lang="en-US"/>
           </a:p>
@@ -685,10 +459,6 @@
           <a:bodyPr/>
           <a:lstStyle/>
           <a:p>
-            <a:r>
-              <a:rPr lang="en-US" dirty="0"/>
-              <a:t/>
-            </a:r>
             <a:endParaRPr lang="en-US" dirty="0"/>
           </a:p>
         </p:txBody>
@@ -773,10 +543,6 @@
           <a:bodyPr/>
           <a:lstStyle/>
           <a:p>
-            <a:r>
-              <a:rPr lang="en-US" dirty="0"/>
-              <a:t/>
-            </a:r>
             <a:endParaRPr lang="en-US" dirty="0"/>
           </a:p>
         </p:txBody>
@@ -861,10 +627,6 @@
           <a:bodyPr/>
           <a:lstStyle/>
           <a:p>
-            <a:r>
-              <a:rPr lang="en-US" dirty="0"/>
-              <a:t/>
-            </a:r>
             <a:endParaRPr lang="en-US" dirty="0"/>
           </a:p>
         </p:txBody>
@@ -949,10 +711,6 @@
           <a:bodyPr/>
           <a:lstStyle/>
           <a:p>
-            <a:r>
-              <a:rPr lang="en-US" dirty="0"/>
-              <a:t/>
-            </a:r>
             <a:endParaRPr lang="en-US" dirty="0"/>
           </a:p>
         </p:txBody>
@@ -1037,10 +795,6 @@
           <a:bodyPr/>
           <a:lstStyle/>
           <a:p>
-            <a:r>
-              <a:rPr lang="en-US" dirty="0"/>
-              <a:t/>
-            </a:r>
             <a:endParaRPr lang="en-US" dirty="0"/>
           </a:p>
         </p:txBody>
@@ -1125,10 +879,6 @@
           <a:bodyPr/>
           <a:lstStyle/>
           <a:p>
-            <a:r>
-              <a:rPr lang="en-US" dirty="0"/>
-              <a:t/>
-            </a:r>
             <a:endParaRPr lang="en-US" dirty="0"/>
           </a:p>
         </p:txBody>
@@ -1213,10 +963,6 @@
           <a:bodyPr/>
           <a:lstStyle/>
           <a:p>
-            <a:r>
-              <a:rPr lang="en-US" dirty="0"/>
-              <a:t/>
-            </a:r>
             <a:endParaRPr lang="en-US" dirty="0"/>
           </a:p>
         </p:txBody>
@@ -1301,10 +1047,6 @@
           <a:bodyPr/>
           <a:lstStyle/>
           <a:p>
-            <a:r>
-              <a:rPr lang="en-US" dirty="0"/>
-              <a:t/>
-            </a:r>
             <a:endParaRPr lang="en-US" dirty="0"/>
           </a:p>
         </p:txBody>
@@ -1378,6 +1120,11 @@
 <file path=ppt/slideMasters/slideMaster1.xml><?xml version="1.0" encoding="utf-8"?>
 <p:sldMaster xmlns:a="http://schemas.openxmlformats.org/drawingml/2006/main" xmlns:r="http://schemas.openxmlformats.org/officeDocument/2006/relationships" xmlns:p="http://schemas.openxmlformats.org/presentationml/2006/main">
   <p:cSld>
+    <p:bg>
+      <p:bgRef idx="1001">
+        <a:schemeClr val="bg1"/>
+      </p:bgRef>
+    </p:bg>
     <p:spTree>
       <p:nvGrpSpPr>
         <p:cNvPr id="1" name=""/>
@@ -1660,6 +1407,7 @@
         <a:solidFill>
           <a:srgbClr val="1A3A5C"/>
         </a:solidFill>
+        <a:effectLst/>
       </p:bgPr>
     </p:bg>
     <p:spTree>
@@ -1741,7 +1489,7 @@
           <a:bodyPr wrap="square" lIns="0" tIns="0" rIns="0" bIns="0" rtlCol="0" anchor="ctr"/>
           <a:lstStyle/>
           <a:p>
-            <a:pPr algn="l" indent="0" marL="0">
+            <a:pPr marL="0" indent="0" algn="l">
               <a:buNone/>
             </a:pPr>
             <a:r>
@@ -1780,7 +1528,7 @@
           <a:bodyPr wrap="square" lIns="0" tIns="0" rIns="0" bIns="0" rtlCol="0" anchor="ctr"/>
           <a:lstStyle/>
           <a:p>
-            <a:pPr algn="l" indent="0" marL="0">
+            <a:pPr marL="0" indent="0" algn="l">
               <a:buNone/>
             </a:pPr>
             <a:r>
@@ -1819,7 +1567,7 @@
           <a:bodyPr wrap="square" lIns="0" tIns="0" rIns="0" bIns="0" rtlCol="0" anchor="ctr"/>
           <a:lstStyle/>
           <a:p>
-            <a:pPr algn="l" indent="0" marL="0">
+            <a:pPr marL="0" indent="0" algn="l">
               <a:buNone/>
             </a:pPr>
             <a:r>
@@ -1878,7 +1626,7 @@
           <a:bodyPr wrap="square" lIns="0" tIns="0" rIns="0" bIns="0" rtlCol="0" anchor="ctr"/>
           <a:lstStyle/>
           <a:p>
-            <a:pPr algn="ctr" indent="0" marL="0">
+            <a:pPr marL="0" indent="0" algn="ctr">
               <a:buNone/>
             </a:pPr>
             <a:r>
@@ -1941,7 +1689,7 @@
           <a:bodyPr wrap="square" lIns="0" tIns="0" rIns="0" bIns="0" rtlCol="0" anchor="ctr"/>
           <a:lstStyle/>
           <a:p>
-            <a:pPr algn="ctr" indent="0" marL="0">
+            <a:pPr marL="0" indent="0" algn="ctr">
               <a:buNone/>
             </a:pPr>
             <a:r>
@@ -2004,7 +1752,7 @@
           <a:bodyPr wrap="square" lIns="0" tIns="0" rIns="0" bIns="0" rtlCol="0" anchor="ctr"/>
           <a:lstStyle/>
           <a:p>
-            <a:pPr algn="ctr" indent="0" marL="0">
+            <a:pPr marL="0" indent="0" algn="ctr">
               <a:buNone/>
             </a:pPr>
             <a:r>
@@ -2067,7 +1815,7 @@
           <a:bodyPr wrap="square" lIns="0" tIns="0" rIns="0" bIns="0" rtlCol="0" anchor="ctr"/>
           <a:lstStyle/>
           <a:p>
-            <a:pPr algn="ctr" indent="0" marL="0">
+            <a:pPr marL="0" indent="0" algn="ctr">
               <a:buNone/>
             </a:pPr>
             <a:r>
@@ -2130,7 +1878,7 @@
           <a:bodyPr wrap="square" lIns="0" tIns="0" rIns="0" bIns="0" rtlCol="0" anchor="ctr"/>
           <a:lstStyle/>
           <a:p>
-            <a:pPr algn="ctr" indent="0" marL="0">
+            <a:pPr marL="0" indent="0" algn="ctr">
               <a:buNone/>
             </a:pPr>
             <a:r>
@@ -2155,12 +1903,73 @@
 
 <file path=ppt/slides/slide10.xml><?xml version="1.0" encoding="utf-8"?>
 <p:sld xmlns:a="http://schemas.openxmlformats.org/drawingml/2006/main" xmlns:r="http://schemas.openxmlformats.org/officeDocument/2006/relationships" xmlns:p="http://schemas.openxmlformats.org/presentationml/2006/main">
+  <p:cSld>
+    <p:spTree>
+      <p:nvGrpSpPr>
+        <p:cNvPr id="1" name=""/>
+        <p:cNvGrpSpPr/>
+        <p:nvPr/>
+      </p:nvGrpSpPr>
+      <p:grpSpPr>
+        <a:xfrm>
+          <a:off x="0" y="0"/>
+          <a:ext cx="0" cy="0"/>
+          <a:chOff x="0" y="0"/>
+          <a:chExt cx="0" cy="0"/>
+        </a:xfrm>
+      </p:grpSpPr>
+      <p:pic>
+        <p:nvPicPr>
+          <p:cNvPr id="3" name="图片 2">
+            <a:extLst>
+              <a:ext uri="{FF2B5EF4-FFF2-40B4-BE49-F238E27FC236}">
+                <a16:creationId xmlns:a16="http://schemas.microsoft.com/office/drawing/2014/main" id="{13226D5E-C3C8-711F-BF97-841B364BB39D}"/>
+              </a:ext>
+            </a:extLst>
+          </p:cNvPr>
+          <p:cNvPicPr>
+            <a:picLocks noChangeAspect="1"/>
+          </p:cNvPicPr>
+          <p:nvPr/>
+        </p:nvPicPr>
+        <p:blipFill>
+          <a:blip r:embed="rId2"/>
+          <a:stretch>
+            <a:fillRect/>
+          </a:stretch>
+        </p:blipFill>
+        <p:spPr>
+          <a:xfrm>
+            <a:off x="442912" y="338137"/>
+            <a:ext cx="8124825" cy="3781425"/>
+          </a:xfrm>
+          <a:prstGeom prst="rect">
+            <a:avLst/>
+          </a:prstGeom>
+        </p:spPr>
+      </p:pic>
+    </p:spTree>
+    <p:extLst>
+      <p:ext uri="{BB962C8B-B14F-4D97-AF65-F5344CB8AC3E}">
+        <p14:creationId xmlns:p14="http://schemas.microsoft.com/office/powerpoint/2010/main" val="2214797806"/>
+      </p:ext>
+    </p:extLst>
+  </p:cSld>
+  <p:clrMapOvr>
+    <a:masterClrMapping/>
+  </p:clrMapOvr>
+</p:sld>
+</file>
+
+<file path=ppt/slides/slide11.xml><?xml version="1.0" encoding="utf-8"?>
+<p:sld xmlns:a="http://schemas.openxmlformats.org/drawingml/2006/main" xmlns:r="http://schemas.openxmlformats.org/officeDocument/2006/relationships" xmlns:p="http://schemas.openxmlformats.org/presentationml/2006/main">
   <p:cSld name="Slide 10">
     <p:bg>
       <p:bgPr>
         <a:solidFill>
           <a:srgbClr val="1A3A5C"/>
         </a:solidFill>
+        <a:effectLst/>
       </p:bgPr>
     </p:bg>
     <p:spTree>
@@ -2242,7 +2051,7 @@
           <a:bodyPr wrap="square" lIns="0" tIns="0" rIns="0" bIns="0" rtlCol="0" anchor="ctr"/>
           <a:lstStyle/>
           <a:p>
-            <a:pPr algn="l" indent="0" marL="0">
+            <a:pPr marL="0" indent="0" algn="l">
               <a:buNone/>
             </a:pPr>
             <a:r>
@@ -2281,7 +2090,7 @@
           <a:bodyPr wrap="square" lIns="0" tIns="0" rIns="0" bIns="0" rtlCol="0" anchor="ctr"/>
           <a:lstStyle/>
           <a:p>
-            <a:pPr algn="l" indent="0" marL="0">
+            <a:pPr marL="0" indent="0" algn="l">
               <a:buNone/>
             </a:pPr>
             <a:r>
@@ -2320,7 +2129,7 @@
           <a:bodyPr wrap="square" lIns="0" tIns="0" rIns="0" bIns="0" rtlCol="0" anchor="ctr"/>
           <a:lstStyle/>
           <a:p>
-            <a:pPr algn="l" indent="0" marL="0">
+            <a:pPr marL="0" indent="0" algn="l">
               <a:buNone/>
             </a:pPr>
             <a:r>
@@ -2359,7 +2168,7 @@
           <a:bodyPr wrap="square" rtlCol="0" anchor="ctr"/>
           <a:lstStyle/>
           <a:p>
-            <a:pPr algn="r" indent="0" marL="0">
+            <a:pPr marL="0" indent="0" algn="r">
               <a:buNone/>
             </a:pPr>
             <a:r>
@@ -2390,6 +2199,7 @@
         <a:solidFill>
           <a:srgbClr val="F0F7FF"/>
         </a:solidFill>
+        <a:effectLst/>
       </p:bgPr>
     </p:bg>
     <p:spTree>
@@ -2467,7 +2277,7 @@
           <a:bodyPr wrap="square" lIns="0" tIns="0" rIns="0" bIns="0" rtlCol="0" anchor="ctr"/>
           <a:lstStyle/>
           <a:p>
-            <a:pPr indent="0" marL="0">
+            <a:pPr marL="0" indent="0">
               <a:buNone/>
             </a:pPr>
             <a:r>
@@ -2506,7 +2316,7 @@
           <a:bodyPr wrap="square" lIns="0" tIns="0" rIns="0" bIns="0" rtlCol="0" anchor="ctr"/>
           <a:lstStyle/>
           <a:p>
-            <a:pPr indent="0" marL="0">
+            <a:pPr marL="0" indent="0">
               <a:buNone/>
             </a:pPr>
             <a:r>
@@ -2545,7 +2355,7 @@
           <a:bodyPr wrap="square" rtlCol="0" anchor="ctr"/>
           <a:lstStyle/>
           <a:p>
-            <a:pPr algn="r" indent="0" marL="0">
+            <a:pPr marL="0" indent="0" algn="r">
               <a:buNone/>
             </a:pPr>
             <a:r>
@@ -2579,7 +2389,7 @@
           </a:solidFill>
           <a:ln/>
           <a:effectLst>
-            <a:outerShdw sx="100000" sy="100000" kx="0" ky="0" algn="bl" rotWithShape="0" blurRad="76200" dist="25400" dir="8100000">
+            <a:outerShdw blurRad="76200" dist="25400" dir="8100000" algn="bl" rotWithShape="0">
               <a:srgbClr val="000000">
                 <a:alpha val="8000"/>
               </a:srgbClr>
@@ -2628,7 +2438,7 @@
           <a:bodyPr wrap="square" lIns="0" tIns="0" rIns="0" bIns="0" rtlCol="0" anchor="ctr"/>
           <a:lstStyle/>
           <a:p>
-            <a:pPr indent="0" marL="0">
+            <a:pPr marL="0" indent="0">
               <a:buNone/>
             </a:pPr>
             <a:r>
@@ -2664,7 +2474,7 @@
           <a:bodyPr wrap="square" lIns="0" tIns="0" rIns="0" bIns="0" rtlCol="0" anchor="t"/>
           <a:lstStyle/>
           <a:p>
-            <a:pPr indent="0" marL="0">
+            <a:pPr marL="0" indent="0">
               <a:buNone/>
             </a:pPr>
             <a:r>
@@ -2678,7 +2488,7 @@
             <a:endParaRPr lang="en-US" sz="1200" dirty="0"/>
           </a:p>
           <a:p>
-            <a:pPr indent="0" marL="0">
+            <a:pPr marL="0" indent="0">
               <a:buNone/>
             </a:pPr>
             <a:r>
@@ -2692,7 +2502,7 @@
             <a:endParaRPr lang="en-US" sz="1200" dirty="0"/>
           </a:p>
           <a:p>
-            <a:pPr indent="0" marL="0">
+            <a:pPr marL="0" indent="0">
               <a:buNone/>
             </a:pPr>
             <a:r>
@@ -2706,7 +2516,7 @@
             <a:endParaRPr lang="en-US" sz="1200" dirty="0"/>
           </a:p>
           <a:p>
-            <a:pPr indent="0" marL="0">
+            <a:pPr marL="0" indent="0">
               <a:buNone/>
             </a:pPr>
             <a:r>
@@ -2720,13 +2530,13 @@
             <a:endParaRPr lang="en-US" sz="1200" dirty="0"/>
           </a:p>
           <a:p>
-            <a:pPr indent="0" marL="0">
+            <a:pPr marL="0" indent="0">
               <a:buNone/>
             </a:pPr>
             <a:endParaRPr lang="en-US" sz="1200" dirty="0"/>
           </a:p>
           <a:p>
-            <a:pPr indent="0" marL="0">
+            <a:pPr marL="0" indent="0">
               <a:buNone/>
             </a:pPr>
             <a:r>
@@ -2740,7 +2550,7 @@
             <a:endParaRPr lang="en-US" sz="1200" dirty="0"/>
           </a:p>
           <a:p>
-            <a:pPr indent="0" marL="0">
+            <a:pPr marL="0" indent="0">
               <a:buNone/>
             </a:pPr>
             <a:r>
@@ -2754,7 +2564,7 @@
             <a:endParaRPr lang="en-US" sz="1200" dirty="0"/>
           </a:p>
           <a:p>
-            <a:pPr indent="0" marL="0">
+            <a:pPr marL="0" indent="0">
               <a:buNone/>
             </a:pPr>
             <a:r>
@@ -2788,7 +2598,7 @@
           </a:solidFill>
           <a:ln/>
           <a:effectLst>
-            <a:outerShdw sx="100000" sy="100000" kx="0" ky="0" algn="bl" rotWithShape="0" blurRad="76200" dist="25400" dir="8100000">
+            <a:outerShdw blurRad="76200" dist="25400" dir="8100000" algn="bl" rotWithShape="0">
               <a:srgbClr val="000000">
                 <a:alpha val="8000"/>
               </a:srgbClr>
@@ -2837,7 +2647,7 @@
           <a:bodyPr wrap="square" lIns="0" tIns="0" rIns="0" bIns="0" rtlCol="0" anchor="ctr"/>
           <a:lstStyle/>
           <a:p>
-            <a:pPr indent="0" marL="0">
+            <a:pPr marL="0" indent="0">
               <a:buNone/>
             </a:pPr>
             <a:r>
@@ -2873,7 +2683,7 @@
           <a:bodyPr wrap="square" lIns="0" tIns="0" rIns="0" bIns="0" rtlCol="0" anchor="t"/>
           <a:lstStyle/>
           <a:p>
-            <a:pPr indent="0" marL="0">
+            <a:pPr marL="0" indent="0">
               <a:buNone/>
             </a:pPr>
             <a:r>
@@ -2887,7 +2697,7 @@
             <a:endParaRPr lang="en-US" sz="1200" dirty="0"/>
           </a:p>
           <a:p>
-            <a:pPr indent="0" marL="0">
+            <a:pPr marL="0" indent="0">
               <a:buNone/>
             </a:pPr>
             <a:r>
@@ -2901,13 +2711,13 @@
             <a:endParaRPr lang="en-US" sz="1200" dirty="0"/>
           </a:p>
           <a:p>
-            <a:pPr indent="0" marL="0">
+            <a:pPr marL="0" indent="0">
               <a:buNone/>
             </a:pPr>
             <a:endParaRPr lang="en-US" sz="1200" dirty="0"/>
           </a:p>
           <a:p>
-            <a:pPr indent="0" marL="0">
+            <a:pPr marL="0" indent="0">
               <a:buNone/>
             </a:pPr>
             <a:r>
@@ -2921,7 +2731,7 @@
             <a:endParaRPr lang="en-US" sz="1200" dirty="0"/>
           </a:p>
           <a:p>
-            <a:pPr indent="0" marL="0">
+            <a:pPr marL="0" indent="0">
               <a:buNone/>
             </a:pPr>
             <a:r>
@@ -2935,7 +2745,7 @@
             <a:endParaRPr lang="en-US" sz="1200" dirty="0"/>
           </a:p>
           <a:p>
-            <a:pPr indent="0" marL="0">
+            <a:pPr marL="0" indent="0">
               <a:buNone/>
             </a:pPr>
             <a:r>
@@ -2949,7 +2759,7 @@
             <a:endParaRPr lang="en-US" sz="1200" dirty="0"/>
           </a:p>
           <a:p>
-            <a:pPr indent="0" marL="0">
+            <a:pPr marL="0" indent="0">
               <a:buNone/>
             </a:pPr>
             <a:r>
@@ -2985,7 +2795,7 @@
           <a:bodyPr wrap="square" lIns="0" tIns="0" rIns="0" bIns="0" rtlCol="0" anchor="ctr"/>
           <a:lstStyle/>
           <a:p>
-            <a:pPr indent="0" marL="0">
+            <a:pPr marL="0" indent="0">
               <a:buNone/>
             </a:pPr>
             <a:r>
@@ -3021,7 +2831,7 @@
           <a:bodyPr wrap="square" lIns="0" tIns="0" rIns="0" bIns="0" rtlCol="0" anchor="ctr"/>
           <a:lstStyle/>
           <a:p>
-            <a:pPr indent="0" marL="0">
+            <a:pPr marL="0" indent="0">
               <a:buNone/>
             </a:pPr>
             <a:r>
@@ -3055,7 +2865,7 @@
           </a:solidFill>
           <a:ln/>
           <a:effectLst>
-            <a:outerShdw sx="100000" sy="100000" kx="0" ky="0" algn="bl" rotWithShape="0" blurRad="76200" dist="25400" dir="8100000">
+            <a:outerShdw blurRad="76200" dist="25400" dir="8100000" algn="bl" rotWithShape="0">
               <a:srgbClr val="000000">
                 <a:alpha val="8000"/>
               </a:srgbClr>
@@ -3084,7 +2894,7 @@
           <a:bodyPr wrap="square" lIns="0" tIns="0" rIns="0" bIns="0" rtlCol="0" anchor="ctr"/>
           <a:lstStyle/>
           <a:p>
-            <a:pPr algn="ctr" indent="0" marL="0">
+            <a:pPr marL="0" indent="0" algn="ctr">
               <a:buNone/>
             </a:pPr>
             <a:r>
@@ -3120,7 +2930,7 @@
           <a:bodyPr wrap="square" lIns="0" tIns="0" rIns="0" bIns="0" rtlCol="0" anchor="ctr"/>
           <a:lstStyle/>
           <a:p>
-            <a:pPr algn="ctr" indent="0" marL="0">
+            <a:pPr marL="0" indent="0" algn="ctr">
               <a:buNone/>
             </a:pPr>
             <a:r>
@@ -3154,7 +2964,7 @@
           </a:solidFill>
           <a:ln/>
           <a:effectLst>
-            <a:outerShdw sx="100000" sy="100000" kx="0" ky="0" algn="bl" rotWithShape="0" blurRad="76200" dist="25400" dir="8100000">
+            <a:outerShdw blurRad="76200" dist="25400" dir="8100000" algn="bl" rotWithShape="0">
               <a:srgbClr val="000000">
                 <a:alpha val="8000"/>
               </a:srgbClr>
@@ -3183,7 +2993,7 @@
           <a:bodyPr wrap="square" lIns="0" tIns="0" rIns="0" bIns="0" rtlCol="0" anchor="ctr"/>
           <a:lstStyle/>
           <a:p>
-            <a:pPr algn="ctr" indent="0" marL="0">
+            <a:pPr marL="0" indent="0" algn="ctr">
               <a:buNone/>
             </a:pPr>
             <a:r>
@@ -3219,7 +3029,7 @@
           <a:bodyPr wrap="square" lIns="0" tIns="0" rIns="0" bIns="0" rtlCol="0" anchor="ctr"/>
           <a:lstStyle/>
           <a:p>
-            <a:pPr algn="ctr" indent="0" marL="0">
+            <a:pPr marL="0" indent="0" algn="ctr">
               <a:buNone/>
             </a:pPr>
             <a:r>
@@ -3253,7 +3063,7 @@
           </a:solidFill>
           <a:ln/>
           <a:effectLst>
-            <a:outerShdw sx="100000" sy="100000" kx="0" ky="0" algn="bl" rotWithShape="0" blurRad="76200" dist="25400" dir="8100000">
+            <a:outerShdw blurRad="76200" dist="25400" dir="8100000" algn="bl" rotWithShape="0">
               <a:srgbClr val="000000">
                 <a:alpha val="8000"/>
               </a:srgbClr>
@@ -3282,7 +3092,7 @@
           <a:bodyPr wrap="square" lIns="0" tIns="0" rIns="0" bIns="0" rtlCol="0" anchor="ctr"/>
           <a:lstStyle/>
           <a:p>
-            <a:pPr algn="ctr" indent="0" marL="0">
+            <a:pPr marL="0" indent="0" algn="ctr">
               <a:buNone/>
             </a:pPr>
             <a:r>
@@ -3318,7 +3128,7 @@
           <a:bodyPr wrap="square" lIns="0" tIns="0" rIns="0" bIns="0" rtlCol="0" anchor="ctr"/>
           <a:lstStyle/>
           <a:p>
-            <a:pPr algn="ctr" indent="0" marL="0">
+            <a:pPr marL="0" indent="0" algn="ctr">
               <a:buNone/>
             </a:pPr>
             <a:r>
@@ -3349,6 +3159,7 @@
         <a:solidFill>
           <a:srgbClr val="F0F7FF"/>
         </a:solidFill>
+        <a:effectLst/>
       </p:bgPr>
     </p:bg>
     <p:spTree>
@@ -3426,7 +3237,7 @@
           <a:bodyPr wrap="square" lIns="0" tIns="0" rIns="0" bIns="0" rtlCol="0" anchor="ctr"/>
           <a:lstStyle/>
           <a:p>
-            <a:pPr indent="0" marL="0">
+            <a:pPr marL="0" indent="0">
               <a:buNone/>
             </a:pPr>
             <a:r>
@@ -3465,7 +3276,7 @@
           <a:bodyPr wrap="square" lIns="0" tIns="0" rIns="0" bIns="0" rtlCol="0" anchor="ctr"/>
           <a:lstStyle/>
           <a:p>
-            <a:pPr indent="0" marL="0">
+            <a:pPr marL="0" indent="0">
               <a:buNone/>
             </a:pPr>
             <a:r>
@@ -3504,7 +3315,7 @@
           <a:bodyPr wrap="square" rtlCol="0" anchor="ctr"/>
           <a:lstStyle/>
           <a:p>
-            <a:pPr algn="r" indent="0" marL="0">
+            <a:pPr marL="0" indent="0" algn="r">
               <a:buNone/>
             </a:pPr>
             <a:r>
@@ -3538,7 +3349,7 @@
           </a:solidFill>
           <a:ln/>
           <a:effectLst>
-            <a:outerShdw sx="100000" sy="100000" kx="0" ky="0" algn="bl" rotWithShape="0" blurRad="101600" dist="38100" dir="8100000">
+            <a:outerShdw blurRad="101600" dist="38100" dir="8100000" algn="bl" rotWithShape="0">
               <a:srgbClr val="000000">
                 <a:alpha val="10000"/>
               </a:srgbClr>
@@ -3567,7 +3378,7 @@
           <a:bodyPr wrap="square" lIns="0" tIns="0" rIns="0" bIns="0" rtlCol="0" anchor="ctr"/>
           <a:lstStyle/>
           <a:p>
-            <a:pPr indent="0" marL="0">
+            <a:pPr marL="0" indent="0">
               <a:buNone/>
             </a:pPr>
             <a:r>
@@ -3603,7 +3414,7 @@
           <a:bodyPr wrap="square" lIns="0" tIns="0" rIns="0" bIns="0" rtlCol="0" anchor="t"/>
           <a:lstStyle/>
           <a:p>
-            <a:pPr indent="0" marL="0">
+            <a:pPr marL="0" indent="0">
               <a:buNone/>
             </a:pPr>
             <a:r>
@@ -3617,7 +3428,7 @@
             <a:endParaRPr lang="en-US" sz="1200" dirty="0"/>
           </a:p>
           <a:p>
-            <a:pPr indent="0" marL="0">
+            <a:pPr marL="0" indent="0">
               <a:buNone/>
             </a:pPr>
             <a:r>
@@ -3631,7 +3442,7 @@
             <a:endParaRPr lang="en-US" sz="1200" dirty="0"/>
           </a:p>
           <a:p>
-            <a:pPr indent="0" marL="0">
+            <a:pPr marL="0" indent="0">
               <a:buNone/>
             </a:pPr>
             <a:r>
@@ -3687,7 +3498,7 @@
           <a:bodyPr wrap="square" lIns="0" tIns="0" rIns="0" bIns="0" rtlCol="0" anchor="ctr"/>
           <a:lstStyle/>
           <a:p>
-            <a:pPr algn="ctr" indent="0" marL="0">
+            <a:pPr marL="0" indent="0" algn="ctr">
               <a:buNone/>
             </a:pPr>
             <a:r>
@@ -3721,7 +3532,7 @@
           </a:solidFill>
           <a:ln/>
           <a:effectLst>
-            <a:outerShdw sx="100000" sy="100000" kx="0" ky="0" algn="bl" rotWithShape="0" blurRad="101600" dist="38100" dir="8100000">
+            <a:outerShdw blurRad="101600" dist="38100" dir="8100000" algn="bl" rotWithShape="0">
               <a:srgbClr val="000000">
                 <a:alpha val="10000"/>
               </a:srgbClr>
@@ -3770,7 +3581,7 @@
           <a:bodyPr wrap="square" lIns="0" tIns="0" rIns="0" bIns="0" rtlCol="0" anchor="ctr"/>
           <a:lstStyle/>
           <a:p>
-            <a:pPr indent="0" marL="0">
+            <a:pPr marL="0" indent="0">
               <a:buNone/>
             </a:pPr>
             <a:r>
@@ -3806,7 +3617,7 @@
           <a:bodyPr wrap="square" lIns="0" tIns="0" rIns="0" bIns="0" rtlCol="0" anchor="t"/>
           <a:lstStyle/>
           <a:p>
-            <a:pPr indent="0" marL="0">
+            <a:pPr marL="0" indent="0">
               <a:buNone/>
             </a:pPr>
             <a:r>
@@ -3820,7 +3631,7 @@
             <a:endParaRPr lang="en-US" sz="1200" dirty="0"/>
           </a:p>
           <a:p>
-            <a:pPr indent="0" marL="0">
+            <a:pPr marL="0" indent="0">
               <a:buNone/>
             </a:pPr>
             <a:r>
@@ -3834,7 +3645,7 @@
             <a:endParaRPr lang="en-US" sz="1200" dirty="0"/>
           </a:p>
           <a:p>
-            <a:pPr indent="0" marL="0">
+            <a:pPr marL="0" indent="0">
               <a:buNone/>
             </a:pPr>
             <a:r>
@@ -3890,7 +3701,7 @@
           <a:bodyPr wrap="square" lIns="0" tIns="0" rIns="0" bIns="0" rtlCol="0" anchor="ctr"/>
           <a:lstStyle/>
           <a:p>
-            <a:pPr algn="ctr" indent="0" marL="0">
+            <a:pPr marL="0" indent="0" algn="ctr">
               <a:buNone/>
             </a:pPr>
             <a:r>
@@ -3926,7 +3737,7 @@
           <a:bodyPr wrap="square" lIns="0" tIns="0" rIns="0" bIns="0" rtlCol="0" anchor="ctr"/>
           <a:lstStyle/>
           <a:p>
-            <a:pPr algn="ctr" indent="0" marL="0">
+            <a:pPr marL="0" indent="0" algn="ctr">
               <a:buNone/>
             </a:pPr>
             <a:r>
@@ -3982,7 +3793,7 @@
           <a:bodyPr wrap="square" lIns="0" tIns="0" rIns="0" bIns="0" rtlCol="0" anchor="ctr"/>
           <a:lstStyle/>
           <a:p>
-            <a:pPr algn="ctr" indent="0" marL="0">
+            <a:pPr marL="0" indent="0" algn="ctr">
               <a:buNone/>
             </a:pPr>
             <a:r>
@@ -4018,7 +3829,7 @@
           <a:bodyPr wrap="square" lIns="0" tIns="0" rIns="0" bIns="0" rtlCol="0" anchor="ctr"/>
           <a:lstStyle/>
           <a:p>
-            <a:pPr algn="ctr" indent="0" marL="0">
+            <a:pPr marL="0" indent="0" algn="ctr">
               <a:buNone/>
             </a:pPr>
             <a:r>
@@ -4074,7 +3885,7 @@
           <a:bodyPr wrap="square" lIns="0" tIns="0" rIns="0" bIns="0" rtlCol="0" anchor="ctr"/>
           <a:lstStyle/>
           <a:p>
-            <a:pPr algn="ctr" indent="0" marL="0">
+            <a:pPr marL="0" indent="0" algn="ctr">
               <a:buNone/>
             </a:pPr>
             <a:r>
@@ -4110,7 +3921,7 @@
           <a:bodyPr wrap="square" lIns="0" tIns="0" rIns="0" bIns="0" rtlCol="0" anchor="ctr"/>
           <a:lstStyle/>
           <a:p>
-            <a:pPr algn="ctr" indent="0" marL="0">
+            <a:pPr marL="0" indent="0" algn="ctr">
               <a:buNone/>
             </a:pPr>
             <a:r>
@@ -4166,7 +3977,7 @@
           <a:bodyPr wrap="square" lIns="0" tIns="0" rIns="0" bIns="0" rtlCol="0" anchor="ctr"/>
           <a:lstStyle/>
           <a:p>
-            <a:pPr algn="ctr" indent="0" marL="0">
+            <a:pPr marL="0" indent="0" algn="ctr">
               <a:buNone/>
             </a:pPr>
             <a:r>
@@ -4202,7 +4013,7 @@
           <a:bodyPr wrap="square" lIns="0" tIns="0" rIns="0" bIns="0" rtlCol="0" anchor="ctr"/>
           <a:lstStyle/>
           <a:p>
-            <a:pPr algn="ctr" indent="0" marL="0">
+            <a:pPr marL="0" indent="0" algn="ctr">
               <a:buNone/>
             </a:pPr>
             <a:r>
@@ -4258,7 +4069,7 @@
           <a:bodyPr wrap="square" lIns="0" tIns="0" rIns="0" bIns="0" rtlCol="0" anchor="ctr"/>
           <a:lstStyle/>
           <a:p>
-            <a:pPr algn="ctr" indent="0" marL="0">
+            <a:pPr marL="0" indent="0" algn="ctr">
               <a:buNone/>
             </a:pPr>
             <a:r>
@@ -4294,7 +4105,7 @@
           <a:bodyPr wrap="square" lIns="0" tIns="0" rIns="0" bIns="0" rtlCol="0" anchor="ctr"/>
           <a:lstStyle/>
           <a:p>
-            <a:pPr algn="ctr" indent="0" marL="0">
+            <a:pPr marL="0" indent="0" algn="ctr">
               <a:buNone/>
             </a:pPr>
             <a:r>
@@ -4350,7 +4161,7 @@
           <a:bodyPr wrap="square" lIns="0" tIns="0" rIns="0" bIns="0" rtlCol="0" anchor="ctr"/>
           <a:lstStyle/>
           <a:p>
-            <a:pPr algn="ctr" indent="0" marL="0">
+            <a:pPr marL="0" indent="0" algn="ctr">
               <a:buNone/>
             </a:pPr>
             <a:r>
@@ -4386,7 +4197,7 @@
           <a:bodyPr wrap="square" lIns="0" tIns="0" rIns="0" bIns="0" rtlCol="0" anchor="ctr"/>
           <a:lstStyle/>
           <a:p>
-            <a:pPr indent="0" marL="0">
+            <a:pPr marL="0" indent="0">
               <a:buNone/>
             </a:pPr>
             <a:r>
@@ -4417,6 +4228,7 @@
         <a:solidFill>
           <a:srgbClr val="F0F7FF"/>
         </a:solidFill>
+        <a:effectLst/>
       </p:bgPr>
     </p:bg>
     <p:spTree>
@@ -4494,7 +4306,7 @@
           <a:bodyPr wrap="square" lIns="0" tIns="0" rIns="0" bIns="0" rtlCol="0" anchor="ctr"/>
           <a:lstStyle/>
           <a:p>
-            <a:pPr indent="0" marL="0">
+            <a:pPr marL="0" indent="0">
               <a:buNone/>
             </a:pPr>
             <a:r>
@@ -4533,7 +4345,7 @@
           <a:bodyPr wrap="square" lIns="0" tIns="0" rIns="0" bIns="0" rtlCol="0" anchor="ctr"/>
           <a:lstStyle/>
           <a:p>
-            <a:pPr indent="0" marL="0">
+            <a:pPr marL="0" indent="0">
               <a:buNone/>
             </a:pPr>
             <a:r>
@@ -4572,7 +4384,7 @@
           <a:bodyPr wrap="square" rtlCol="0" anchor="ctr"/>
           <a:lstStyle/>
           <a:p>
-            <a:pPr algn="r" indent="0" marL="0">
+            <a:pPr marL="0" indent="0" algn="r">
               <a:buNone/>
             </a:pPr>
             <a:r>
@@ -4628,7 +4440,7 @@
           <a:bodyPr wrap="square" lIns="0" tIns="0" rIns="0" bIns="0" rtlCol="0" anchor="ctr"/>
           <a:lstStyle/>
           <a:p>
-            <a:pPr algn="ctr" indent="0" marL="0">
+            <a:pPr marL="0" indent="0" algn="ctr">
               <a:buNone/>
             </a:pPr>
             <a:r>
@@ -4662,7 +4474,7 @@
           </a:solidFill>
           <a:ln/>
           <a:effectLst>
-            <a:outerShdw sx="100000" sy="100000" kx="0" ky="0" algn="bl" rotWithShape="0" blurRad="76200" dist="25400" dir="8100000">
+            <a:outerShdw blurRad="76200" dist="25400" dir="8100000" algn="bl" rotWithShape="0">
               <a:srgbClr val="000000">
                 <a:alpha val="8000"/>
               </a:srgbClr>
@@ -4691,7 +4503,7 @@
           <a:bodyPr wrap="square" lIns="0" tIns="0" rIns="0" bIns="0" rtlCol="0" anchor="ctr"/>
           <a:lstStyle/>
           <a:p>
-            <a:pPr algn="ctr" indent="0" marL="0">
+            <a:pPr marL="0" indent="0" algn="ctr">
               <a:buNone/>
             </a:pPr>
             <a:r>
@@ -4727,7 +4539,7 @@
           <a:bodyPr wrap="square" lIns="0" tIns="0" rIns="0" bIns="0" rtlCol="0" anchor="t"/>
           <a:lstStyle/>
           <a:p>
-            <a:pPr algn="ctr" indent="0" marL="0">
+            <a:pPr marL="0" indent="0" algn="ctr">
               <a:buNone/>
             </a:pPr>
             <a:r>
@@ -4741,7 +4553,7 @@
             <a:endParaRPr lang="en-US" sz="1000" dirty="0"/>
           </a:p>
           <a:p>
-            <a:pPr algn="ctr" indent="0" marL="0">
+            <a:pPr marL="0" indent="0" algn="ctr">
               <a:buNone/>
             </a:pPr>
             <a:r>
@@ -4777,7 +4589,7 @@
           <a:bodyPr wrap="square" lIns="0" tIns="0" rIns="0" bIns="0" rtlCol="0" anchor="ctr"/>
           <a:lstStyle/>
           <a:p>
-            <a:pPr algn="ctr" indent="0" marL="0">
+            <a:pPr marL="0" indent="0" algn="ctr">
               <a:buNone/>
             </a:pPr>
             <a:r>
@@ -4833,7 +4645,7 @@
           <a:bodyPr wrap="square" lIns="0" tIns="0" rIns="0" bIns="0" rtlCol="0" anchor="ctr"/>
           <a:lstStyle/>
           <a:p>
-            <a:pPr algn="ctr" indent="0" marL="0">
+            <a:pPr marL="0" indent="0" algn="ctr">
               <a:buNone/>
             </a:pPr>
             <a:r>
@@ -4867,7 +4679,7 @@
           </a:solidFill>
           <a:ln/>
           <a:effectLst>
-            <a:outerShdw sx="100000" sy="100000" kx="0" ky="0" algn="bl" rotWithShape="0" blurRad="76200" dist="25400" dir="8100000">
+            <a:outerShdw blurRad="76200" dist="25400" dir="8100000" algn="bl" rotWithShape="0">
               <a:srgbClr val="000000">
                 <a:alpha val="8000"/>
               </a:srgbClr>
@@ -4896,7 +4708,7 @@
           <a:bodyPr wrap="square" lIns="0" tIns="0" rIns="0" bIns="0" rtlCol="0" anchor="ctr"/>
           <a:lstStyle/>
           <a:p>
-            <a:pPr algn="ctr" indent="0" marL="0">
+            <a:pPr marL="0" indent="0" algn="ctr">
               <a:buNone/>
             </a:pPr>
             <a:r>
@@ -4932,7 +4744,7 @@
           <a:bodyPr wrap="square" lIns="0" tIns="0" rIns="0" bIns="0" rtlCol="0" anchor="t"/>
           <a:lstStyle/>
           <a:p>
-            <a:pPr algn="ctr" indent="0" marL="0">
+            <a:pPr marL="0" indent="0" algn="ctr">
               <a:buNone/>
             </a:pPr>
             <a:r>
@@ -4946,7 +4758,7 @@
             <a:endParaRPr lang="en-US" sz="1000" dirty="0"/>
           </a:p>
           <a:p>
-            <a:pPr algn="ctr" indent="0" marL="0">
+            <a:pPr marL="0" indent="0" algn="ctr">
               <a:buNone/>
             </a:pPr>
             <a:r>
@@ -4982,7 +4794,7 @@
           <a:bodyPr wrap="square" lIns="0" tIns="0" rIns="0" bIns="0" rtlCol="0" anchor="ctr"/>
           <a:lstStyle/>
           <a:p>
-            <a:pPr algn="ctr" indent="0" marL="0">
+            <a:pPr marL="0" indent="0" algn="ctr">
               <a:buNone/>
             </a:pPr>
             <a:r>
@@ -5038,7 +4850,7 @@
           <a:bodyPr wrap="square" lIns="0" tIns="0" rIns="0" bIns="0" rtlCol="0" anchor="ctr"/>
           <a:lstStyle/>
           <a:p>
-            <a:pPr algn="ctr" indent="0" marL="0">
+            <a:pPr marL="0" indent="0" algn="ctr">
               <a:buNone/>
             </a:pPr>
             <a:r>
@@ -5072,7 +4884,7 @@
           </a:solidFill>
           <a:ln/>
           <a:effectLst>
-            <a:outerShdw sx="100000" sy="100000" kx="0" ky="0" algn="bl" rotWithShape="0" blurRad="76200" dist="25400" dir="8100000">
+            <a:outerShdw blurRad="76200" dist="25400" dir="8100000" algn="bl" rotWithShape="0">
               <a:srgbClr val="000000">
                 <a:alpha val="8000"/>
               </a:srgbClr>
@@ -5101,7 +4913,7 @@
           <a:bodyPr wrap="square" lIns="0" tIns="0" rIns="0" bIns="0" rtlCol="0" anchor="ctr"/>
           <a:lstStyle/>
           <a:p>
-            <a:pPr algn="ctr" indent="0" marL="0">
+            <a:pPr marL="0" indent="0" algn="ctr">
               <a:buNone/>
             </a:pPr>
             <a:r>
@@ -5137,7 +4949,7 @@
           <a:bodyPr wrap="square" lIns="0" tIns="0" rIns="0" bIns="0" rtlCol="0" anchor="t"/>
           <a:lstStyle/>
           <a:p>
-            <a:pPr algn="ctr" indent="0" marL="0">
+            <a:pPr marL="0" indent="0" algn="ctr">
               <a:buNone/>
             </a:pPr>
             <a:r>
@@ -5151,7 +4963,7 @@
             <a:endParaRPr lang="en-US" sz="1000" dirty="0"/>
           </a:p>
           <a:p>
-            <a:pPr algn="ctr" indent="0" marL="0">
+            <a:pPr marL="0" indent="0" algn="ctr">
               <a:buNone/>
             </a:pPr>
             <a:r>
@@ -5187,7 +4999,7 @@
           <a:bodyPr wrap="square" lIns="0" tIns="0" rIns="0" bIns="0" rtlCol="0" anchor="ctr"/>
           <a:lstStyle/>
           <a:p>
-            <a:pPr algn="ctr" indent="0" marL="0">
+            <a:pPr marL="0" indent="0" algn="ctr">
               <a:buNone/>
             </a:pPr>
             <a:r>
@@ -5243,7 +5055,7 @@
           <a:bodyPr wrap="square" lIns="0" tIns="0" rIns="0" bIns="0" rtlCol="0" anchor="ctr"/>
           <a:lstStyle/>
           <a:p>
-            <a:pPr algn="ctr" indent="0" marL="0">
+            <a:pPr marL="0" indent="0" algn="ctr">
               <a:buNone/>
             </a:pPr>
             <a:r>
@@ -5277,7 +5089,7 @@
           </a:solidFill>
           <a:ln/>
           <a:effectLst>
-            <a:outerShdw sx="100000" sy="100000" kx="0" ky="0" algn="bl" rotWithShape="0" blurRad="76200" dist="25400" dir="8100000">
+            <a:outerShdw blurRad="76200" dist="25400" dir="8100000" algn="bl" rotWithShape="0">
               <a:srgbClr val="000000">
                 <a:alpha val="8000"/>
               </a:srgbClr>
@@ -5306,7 +5118,7 @@
           <a:bodyPr wrap="square" lIns="0" tIns="0" rIns="0" bIns="0" rtlCol="0" anchor="ctr"/>
           <a:lstStyle/>
           <a:p>
-            <a:pPr algn="ctr" indent="0" marL="0">
+            <a:pPr marL="0" indent="0" algn="ctr">
               <a:buNone/>
             </a:pPr>
             <a:r>
@@ -5342,7 +5154,7 @@
           <a:bodyPr wrap="square" lIns="0" tIns="0" rIns="0" bIns="0" rtlCol="0" anchor="t"/>
           <a:lstStyle/>
           <a:p>
-            <a:pPr algn="ctr" indent="0" marL="0">
+            <a:pPr marL="0" indent="0" algn="ctr">
               <a:buNone/>
             </a:pPr>
             <a:r>
@@ -5356,7 +5168,7 @@
             <a:endParaRPr lang="en-US" sz="1000" dirty="0"/>
           </a:p>
           <a:p>
-            <a:pPr algn="ctr" indent="0" marL="0">
+            <a:pPr marL="0" indent="0" algn="ctr">
               <a:buNone/>
             </a:pPr>
             <a:r>
@@ -5392,7 +5204,7 @@
           <a:bodyPr wrap="square" lIns="0" tIns="0" rIns="0" bIns="0" rtlCol="0" anchor="ctr"/>
           <a:lstStyle/>
           <a:p>
-            <a:pPr algn="ctr" indent="0" marL="0">
+            <a:pPr marL="0" indent="0" algn="ctr">
               <a:buNone/>
             </a:pPr>
             <a:r>
@@ -5448,7 +5260,7 @@
           <a:bodyPr wrap="square" lIns="0" tIns="0" rIns="0" bIns="0" rtlCol="0" anchor="ctr"/>
           <a:lstStyle/>
           <a:p>
-            <a:pPr algn="ctr" indent="0" marL="0">
+            <a:pPr marL="0" indent="0" algn="ctr">
               <a:buNone/>
             </a:pPr>
             <a:r>
@@ -5482,7 +5294,7 @@
           </a:solidFill>
           <a:ln/>
           <a:effectLst>
-            <a:outerShdw sx="100000" sy="100000" kx="0" ky="0" algn="bl" rotWithShape="0" blurRad="76200" dist="25400" dir="8100000">
+            <a:outerShdw blurRad="76200" dist="25400" dir="8100000" algn="bl" rotWithShape="0">
               <a:srgbClr val="000000">
                 <a:alpha val="8000"/>
               </a:srgbClr>
@@ -5511,7 +5323,7 @@
           <a:bodyPr wrap="square" lIns="0" tIns="0" rIns="0" bIns="0" rtlCol="0" anchor="ctr"/>
           <a:lstStyle/>
           <a:p>
-            <a:pPr algn="ctr" indent="0" marL="0">
+            <a:pPr marL="0" indent="0" algn="ctr">
               <a:buNone/>
             </a:pPr>
             <a:r>
@@ -5547,7 +5359,7 @@
           <a:bodyPr wrap="square" lIns="0" tIns="0" rIns="0" bIns="0" rtlCol="0" anchor="t"/>
           <a:lstStyle/>
           <a:p>
-            <a:pPr algn="ctr" indent="0" marL="0">
+            <a:pPr marL="0" indent="0" algn="ctr">
               <a:buNone/>
             </a:pPr>
             <a:r>
@@ -5561,7 +5373,7 @@
             <a:endParaRPr lang="en-US" sz="1000" dirty="0"/>
           </a:p>
           <a:p>
-            <a:pPr algn="ctr" indent="0" marL="0">
+            <a:pPr marL="0" indent="0" algn="ctr">
               <a:buNone/>
             </a:pPr>
             <a:r>
@@ -5617,7 +5429,7 @@
           <a:bodyPr wrap="square" lIns="0" tIns="0" rIns="0" bIns="0" rtlCol="0" anchor="ctr"/>
           <a:lstStyle/>
           <a:p>
-            <a:pPr indent="0" marL="0">
+            <a:pPr marL="0" indent="0">
               <a:buNone/>
             </a:pPr>
             <a:r>
@@ -5634,7 +5446,7 @@
       </p:sp>
       <p:graphicFrame>
         <p:nvGraphicFramePr>
-          <p:cNvPr id="5" name="Table 0"/>
+          <p:cNvPr id="38" name="Table 0"/>
           <p:cNvGraphicFramePr>
             <a:graphicFrameLocks noGrp="1"/>
           </p:cNvGraphicFramePr>
@@ -5648,16 +5460,34 @@
         </p:nvGraphicFramePr>
         <p:xfrm>
           <a:off x="548640" y="3474720"/>
-          <a:ext cx="8046720" cy="1188720"/>
+          <a:ext cx="8046720" cy="1295400"/>
         </p:xfrm>
         <a:graphic>
           <a:graphicData uri="http://schemas.openxmlformats.org/drawingml/2006/table">
             <a:tbl>
               <a:tblPr/>
               <a:tblGrid>
-                <a:gridCol w="1371600"/>
-                <a:gridCol w="3337560"/>
-                <a:gridCol w="3337560"/>
+                <a:gridCol w="1371600">
+                  <a:extLst>
+                    <a:ext uri="{9D8B030D-6E8A-4147-A177-3AD203B41FA5}">
+                      <a16:colId xmlns:a16="http://schemas.microsoft.com/office/drawing/2014/main" val="20000"/>
+                    </a:ext>
+                  </a:extLst>
+                </a:gridCol>
+                <a:gridCol w="3337560">
+                  <a:extLst>
+                    <a:ext uri="{9D8B030D-6E8A-4147-A177-3AD203B41FA5}">
+                      <a16:colId xmlns:a16="http://schemas.microsoft.com/office/drawing/2014/main" val="20001"/>
+                    </a:ext>
+                  </a:extLst>
+                </a:gridCol>
+                <a:gridCol w="3337560">
+                  <a:extLst>
+                    <a:ext uri="{9D8B030D-6E8A-4147-A177-3AD203B41FA5}">
+                      <a16:colId xmlns:a16="http://schemas.microsoft.com/office/drawing/2014/main" val="20002"/>
+                    </a:ext>
+                  </a:extLst>
+                </a:gridCol>
               </a:tblGrid>
               <a:tr h="237744">
                 <a:tc>
@@ -5665,13 +5495,13 @@
                     <a:bodyPr/>
                     <a:lstStyle/>
                     <a:p>
-                      <a:pPr algn="ctr" indent="0" marL="0">
+                      <a:pPr marL="0" indent="0" algn="ctr">
                         <a:buNone/>
                       </a:pPr>
                       <a:endParaRPr lang="en-US" sz="1100" dirty="0"/>
                     </a:p>
                   </a:txBody>
-                  <a:tcPr marL="91440" marR="91440" marT="45720" marB="45720">
+                  <a:tcPr>
                     <a:lnL w="6350" cap="flat" cmpd="sng" algn="ctr">
                       <a:solidFill>
                         <a:srgbClr val="CBD5E1"/>
@@ -5718,7 +5548,7 @@
                     <a:bodyPr/>
                     <a:lstStyle/>
                     <a:p>
-                      <a:pPr algn="ctr" indent="0" marL="0">
+                      <a:pPr marL="0" indent="0" algn="ctr">
                         <a:buNone/>
                       </a:pPr>
                       <a:r>
@@ -5732,7 +5562,7 @@
                       <a:endParaRPr lang="en-US" sz="1100" dirty="0"/>
                     </a:p>
                   </a:txBody>
-                  <a:tcPr marL="91440" marR="91440" marT="45720" marB="45720">
+                  <a:tcPr>
                     <a:lnL w="6350" cap="flat" cmpd="sng" algn="ctr">
                       <a:solidFill>
                         <a:srgbClr val="CBD5E1"/>
@@ -5779,7 +5609,7 @@
                     <a:bodyPr/>
                     <a:lstStyle/>
                     <a:p>
-                      <a:pPr algn="ctr" indent="0" marL="0">
+                      <a:pPr marL="0" indent="0" algn="ctr">
                         <a:buNone/>
                       </a:pPr>
                       <a:r>
@@ -5793,7 +5623,7 @@
                       <a:endParaRPr lang="en-US" sz="1100" dirty="0"/>
                     </a:p>
                   </a:txBody>
-                  <a:tcPr marL="91440" marR="91440" marT="45720" marB="45720">
+                  <a:tcPr>
                     <a:lnL w="6350" cap="flat" cmpd="sng" algn="ctr">
                       <a:solidFill>
                         <a:srgbClr val="CBD5E1"/>
@@ -5835,6 +5665,11 @@
                     </a:solidFill>
                   </a:tcPr>
                 </a:tc>
+                <a:extLst>
+                  <a:ext uri="{0D108BD9-81ED-4DB2-BD59-A6C34878D82A}">
+                    <a16:rowId xmlns:a16="http://schemas.microsoft.com/office/drawing/2014/main" val="10000"/>
+                  </a:ext>
+                </a:extLst>
               </a:tr>
               <a:tr h="237744">
                 <a:tc>
@@ -5842,7 +5677,7 @@
                     <a:bodyPr/>
                     <a:lstStyle/>
                     <a:p>
-                      <a:pPr algn="ctr" indent="0" marL="0">
+                      <a:pPr marL="0" indent="0" algn="ctr">
                         <a:buNone/>
                       </a:pPr>
                       <a:r>
@@ -5856,7 +5691,7 @@
                       <a:endParaRPr lang="en-US" sz="1100" dirty="0"/>
                     </a:p>
                   </a:txBody>
-                  <a:tcPr marL="91440" marR="91440" marT="45720" marB="45720">
+                  <a:tcPr>
                     <a:lnL w="6350" cap="flat" cmpd="sng" algn="ctr">
                       <a:solidFill>
                         <a:srgbClr val="CBD5E1"/>
@@ -5903,7 +5738,7 @@
                     <a:bodyPr/>
                     <a:lstStyle/>
                     <a:p>
-                      <a:pPr algn="ctr" indent="0" marL="0">
+                      <a:pPr marL="0" indent="0" algn="ctr">
                         <a:buNone/>
                       </a:pPr>
                       <a:r>
@@ -5917,7 +5752,7 @@
                       <a:endParaRPr lang="en-US" sz="1100" dirty="0"/>
                     </a:p>
                   </a:txBody>
-                  <a:tcPr marL="91440" marR="91440" marT="45720" marB="45720">
+                  <a:tcPr>
                     <a:lnL w="6350" cap="flat" cmpd="sng" algn="ctr">
                       <a:solidFill>
                         <a:srgbClr val="CBD5E1"/>
@@ -5964,7 +5799,7 @@
                     <a:bodyPr/>
                     <a:lstStyle/>
                     <a:p>
-                      <a:pPr algn="ctr" indent="0" marL="0">
+                      <a:pPr marL="0" indent="0" algn="ctr">
                         <a:buNone/>
                       </a:pPr>
                       <a:r>
@@ -5978,7 +5813,7 @@
                       <a:endParaRPr lang="en-US" sz="1100" dirty="0"/>
                     </a:p>
                   </a:txBody>
-                  <a:tcPr marL="91440" marR="91440" marT="45720" marB="45720">
+                  <a:tcPr>
                     <a:lnL w="6350" cap="flat" cmpd="sng" algn="ctr">
                       <a:solidFill>
                         <a:srgbClr val="CBD5E1"/>
@@ -6020,6 +5855,11 @@
                     </a:solidFill>
                   </a:tcPr>
                 </a:tc>
+                <a:extLst>
+                  <a:ext uri="{0D108BD9-81ED-4DB2-BD59-A6C34878D82A}">
+                    <a16:rowId xmlns:a16="http://schemas.microsoft.com/office/drawing/2014/main" val="10001"/>
+                  </a:ext>
+                </a:extLst>
               </a:tr>
               <a:tr h="237744">
                 <a:tc>
@@ -6027,7 +5867,7 @@
                     <a:bodyPr/>
                     <a:lstStyle/>
                     <a:p>
-                      <a:pPr algn="ctr" indent="0" marL="0">
+                      <a:pPr marL="0" indent="0" algn="ctr">
                         <a:buNone/>
                       </a:pPr>
                       <a:r>
@@ -6041,7 +5881,7 @@
                       <a:endParaRPr lang="en-US" sz="1100" dirty="0"/>
                     </a:p>
                   </a:txBody>
-                  <a:tcPr marL="91440" marR="91440" marT="45720" marB="45720">
+                  <a:tcPr>
                     <a:lnL w="6350" cap="flat" cmpd="sng" algn="ctr">
                       <a:solidFill>
                         <a:srgbClr val="CBD5E1"/>
@@ -6088,7 +5928,7 @@
                     <a:bodyPr/>
                     <a:lstStyle/>
                     <a:p>
-                      <a:pPr algn="ctr" indent="0" marL="0">
+                      <a:pPr marL="0" indent="0" algn="ctr">
                         <a:buNone/>
                       </a:pPr>
                       <a:r>
@@ -6102,7 +5942,7 @@
                       <a:endParaRPr lang="en-US" sz="1100" dirty="0"/>
                     </a:p>
                   </a:txBody>
-                  <a:tcPr marL="91440" marR="91440" marT="45720" marB="45720">
+                  <a:tcPr>
                     <a:lnL w="6350" cap="flat" cmpd="sng" algn="ctr">
                       <a:solidFill>
                         <a:srgbClr val="CBD5E1"/>
@@ -6149,7 +5989,7 @@
                     <a:bodyPr/>
                     <a:lstStyle/>
                     <a:p>
-                      <a:pPr algn="ctr" indent="0" marL="0">
+                      <a:pPr marL="0" indent="0" algn="ctr">
                         <a:buNone/>
                       </a:pPr>
                       <a:r>
@@ -6163,7 +6003,7 @@
                       <a:endParaRPr lang="en-US" sz="1100" dirty="0"/>
                     </a:p>
                   </a:txBody>
-                  <a:tcPr marL="91440" marR="91440" marT="45720" marB="45720">
+                  <a:tcPr>
                     <a:lnL w="6350" cap="flat" cmpd="sng" algn="ctr">
                       <a:solidFill>
                         <a:srgbClr val="CBD5E1"/>
@@ -6205,6 +6045,11 @@
                     </a:solidFill>
                   </a:tcPr>
                 </a:tc>
+                <a:extLst>
+                  <a:ext uri="{0D108BD9-81ED-4DB2-BD59-A6C34878D82A}">
+                    <a16:rowId xmlns:a16="http://schemas.microsoft.com/office/drawing/2014/main" val="10002"/>
+                  </a:ext>
+                </a:extLst>
               </a:tr>
               <a:tr h="237744">
                 <a:tc>
@@ -6212,7 +6057,7 @@
                     <a:bodyPr/>
                     <a:lstStyle/>
                     <a:p>
-                      <a:pPr algn="ctr" indent="0" marL="0">
+                      <a:pPr marL="0" indent="0" algn="ctr">
                         <a:buNone/>
                       </a:pPr>
                       <a:r>
@@ -6226,7 +6071,7 @@
                       <a:endParaRPr lang="en-US" sz="1100" dirty="0"/>
                     </a:p>
                   </a:txBody>
-                  <a:tcPr marL="91440" marR="91440" marT="45720" marB="45720">
+                  <a:tcPr>
                     <a:lnL w="6350" cap="flat" cmpd="sng" algn="ctr">
                       <a:solidFill>
                         <a:srgbClr val="CBD5E1"/>
@@ -6273,7 +6118,7 @@
                     <a:bodyPr/>
                     <a:lstStyle/>
                     <a:p>
-                      <a:pPr algn="ctr" indent="0" marL="0">
+                      <a:pPr marL="0" indent="0" algn="ctr">
                         <a:buNone/>
                       </a:pPr>
                       <a:r>
@@ -6287,7 +6132,7 @@
                       <a:endParaRPr lang="en-US" sz="1100" dirty="0"/>
                     </a:p>
                   </a:txBody>
-                  <a:tcPr marL="91440" marR="91440" marT="45720" marB="45720">
+                  <a:tcPr>
                     <a:lnL w="6350" cap="flat" cmpd="sng" algn="ctr">
                       <a:solidFill>
                         <a:srgbClr val="CBD5E1"/>
@@ -6334,7 +6179,7 @@
                     <a:bodyPr/>
                     <a:lstStyle/>
                     <a:p>
-                      <a:pPr algn="ctr" indent="0" marL="0">
+                      <a:pPr marL="0" indent="0" algn="ctr">
                         <a:buNone/>
                       </a:pPr>
                       <a:r>
@@ -6348,7 +6193,7 @@
                       <a:endParaRPr lang="en-US" sz="1100" dirty="0"/>
                     </a:p>
                   </a:txBody>
-                  <a:tcPr marL="91440" marR="91440" marT="45720" marB="45720">
+                  <a:tcPr>
                     <a:lnL w="6350" cap="flat" cmpd="sng" algn="ctr">
                       <a:solidFill>
                         <a:srgbClr val="CBD5E1"/>
@@ -6390,6 +6235,11 @@
                     </a:solidFill>
                   </a:tcPr>
                 </a:tc>
+                <a:extLst>
+                  <a:ext uri="{0D108BD9-81ED-4DB2-BD59-A6C34878D82A}">
+                    <a16:rowId xmlns:a16="http://schemas.microsoft.com/office/drawing/2014/main" val="10003"/>
+                  </a:ext>
+                </a:extLst>
               </a:tr>
               <a:tr h="237744">
                 <a:tc>
@@ -6397,7 +6247,7 @@
                     <a:bodyPr/>
                     <a:lstStyle/>
                     <a:p>
-                      <a:pPr algn="ctr" indent="0" marL="0">
+                      <a:pPr marL="0" indent="0" algn="ctr">
                         <a:buNone/>
                       </a:pPr>
                       <a:r>
@@ -6411,7 +6261,7 @@
                       <a:endParaRPr lang="en-US" sz="1100" dirty="0"/>
                     </a:p>
                   </a:txBody>
-                  <a:tcPr marL="91440" marR="91440" marT="45720" marB="45720">
+                  <a:tcPr>
                     <a:lnL w="6350" cap="flat" cmpd="sng" algn="ctr">
                       <a:solidFill>
                         <a:srgbClr val="CBD5E1"/>
@@ -6458,7 +6308,7 @@
                     <a:bodyPr/>
                     <a:lstStyle/>
                     <a:p>
-                      <a:pPr algn="ctr" indent="0" marL="0">
+                      <a:pPr marL="0" indent="0" algn="ctr">
                         <a:buNone/>
                       </a:pPr>
                       <a:r>
@@ -6472,7 +6322,7 @@
                       <a:endParaRPr lang="en-US" sz="1100" dirty="0"/>
                     </a:p>
                   </a:txBody>
-                  <a:tcPr marL="91440" marR="91440" marT="45720" marB="45720">
+                  <a:tcPr>
                     <a:lnL w="6350" cap="flat" cmpd="sng" algn="ctr">
                       <a:solidFill>
                         <a:srgbClr val="CBD5E1"/>
@@ -6519,7 +6369,7 @@
                     <a:bodyPr/>
                     <a:lstStyle/>
                     <a:p>
-                      <a:pPr algn="ctr" indent="0" marL="0">
+                      <a:pPr marL="0" indent="0" algn="ctr">
                         <a:buNone/>
                       </a:pPr>
                       <a:r>
@@ -6533,7 +6383,7 @@
                       <a:endParaRPr lang="en-US" sz="1100" dirty="0"/>
                     </a:p>
                   </a:txBody>
-                  <a:tcPr marL="91440" marR="91440" marT="45720" marB="45720">
+                  <a:tcPr>
                     <a:lnL w="6350" cap="flat" cmpd="sng" algn="ctr">
                       <a:solidFill>
                         <a:srgbClr val="CBD5E1"/>
@@ -6575,6 +6425,11 @@
                     </a:solidFill>
                   </a:tcPr>
                 </a:tc>
+                <a:extLst>
+                  <a:ext uri="{0D108BD9-81ED-4DB2-BD59-A6C34878D82A}">
+                    <a16:rowId xmlns:a16="http://schemas.microsoft.com/office/drawing/2014/main" val="10004"/>
+                  </a:ext>
+                </a:extLst>
               </a:tr>
             </a:tbl>
           </a:graphicData>
@@ -6596,6 +6451,7 @@
         <a:solidFill>
           <a:srgbClr val="F0F7FF"/>
         </a:solidFill>
+        <a:effectLst/>
       </p:bgPr>
     </p:bg>
     <p:spTree>
@@ -6673,7 +6529,7 @@
           <a:bodyPr wrap="square" lIns="0" tIns="0" rIns="0" bIns="0" rtlCol="0" anchor="ctr"/>
           <a:lstStyle/>
           <a:p>
-            <a:pPr indent="0" marL="0">
+            <a:pPr marL="0" indent="0">
               <a:buNone/>
             </a:pPr>
             <a:r>
@@ -6712,7 +6568,7 @@
           <a:bodyPr wrap="square" lIns="0" tIns="0" rIns="0" bIns="0" rtlCol="0" anchor="ctr"/>
           <a:lstStyle/>
           <a:p>
-            <a:pPr indent="0" marL="0">
+            <a:pPr marL="0" indent="0">
               <a:buNone/>
             </a:pPr>
             <a:r>
@@ -6751,7 +6607,7 @@
           <a:bodyPr wrap="square" rtlCol="0" anchor="ctr"/>
           <a:lstStyle/>
           <a:p>
-            <a:pPr algn="r" indent="0" marL="0">
+            <a:pPr marL="0" indent="0" algn="r">
               <a:buNone/>
             </a:pPr>
             <a:r>
@@ -6785,13 +6641,20 @@
           </a:solidFill>
           <a:ln/>
           <a:effectLst>
-            <a:outerShdw sx="100000" sy="100000" kx="0" ky="0" algn="bl" rotWithShape="0" blurRad="76200" dist="25400" dir="8100000">
+            <a:outerShdw blurRad="76200" dist="25400" dir="8100000" algn="bl" rotWithShape="0">
               <a:srgbClr val="000000">
                 <a:alpha val="8000"/>
               </a:srgbClr>
             </a:outerShdw>
           </a:effectLst>
         </p:spPr>
+        <p:txBody>
+          <a:bodyPr/>
+          <a:lstStyle/>
+          <a:p>
+            <a:endParaRPr lang="zh-CN" altLang="en-US"/>
+          </a:p>
+        </p:txBody>
       </p:sp>
       <p:sp>
         <p:nvSpPr>
@@ -6834,7 +6697,7 @@
           <a:bodyPr wrap="square" lIns="0" tIns="0" rIns="0" bIns="0" rtlCol="0" anchor="ctr"/>
           <a:lstStyle/>
           <a:p>
-            <a:pPr indent="0" marL="0">
+            <a:pPr marL="0" indent="0">
               <a:buNone/>
             </a:pPr>
             <a:r>
@@ -6870,7 +6733,7 @@
           <a:bodyPr wrap="square" lIns="0" tIns="0" rIns="0" bIns="0" rtlCol="0" anchor="ctr"/>
           <a:lstStyle/>
           <a:p>
-            <a:pPr indent="0" marL="0">
+            <a:pPr marL="0" indent="0">
               <a:buNone/>
             </a:pPr>
             <a:r>
@@ -6926,7 +6789,7 @@
           <a:bodyPr wrap="square" lIns="0" tIns="0" rIns="0" bIns="0" rtlCol="0" anchor="ctr"/>
           <a:lstStyle/>
           <a:p>
-            <a:pPr indent="0" marL="0">
+            <a:pPr marL="0" indent="0">
               <a:buNone/>
             </a:pPr>
             <a:r>
@@ -6962,7 +6825,7 @@
           <a:bodyPr wrap="square" lIns="0" tIns="0" rIns="0" bIns="0" rtlCol="0" anchor="ctr"/>
           <a:lstStyle/>
           <a:p>
-            <a:pPr indent="0" marL="0">
+            <a:pPr marL="0" indent="0">
               <a:buNone/>
             </a:pPr>
             <a:r>
@@ -6998,7 +6861,7 @@
           <a:bodyPr wrap="square" lIns="0" tIns="0" rIns="0" bIns="0" rtlCol="0" anchor="ctr"/>
           <a:lstStyle/>
           <a:p>
-            <a:pPr indent="0" marL="0">
+            <a:pPr marL="0" indent="0">
               <a:buNone/>
             </a:pPr>
             <a:r>
@@ -7032,7 +6895,7 @@
           </a:solidFill>
           <a:ln/>
           <a:effectLst>
-            <a:outerShdw sx="100000" sy="100000" kx="0" ky="0" algn="bl" rotWithShape="0" blurRad="76200" dist="25400" dir="8100000">
+            <a:outerShdw blurRad="76200" dist="25400" dir="8100000" algn="bl" rotWithShape="0">
               <a:srgbClr val="000000">
                 <a:alpha val="8000"/>
               </a:srgbClr>
@@ -7081,7 +6944,7 @@
           <a:bodyPr wrap="square" lIns="0" tIns="0" rIns="0" bIns="0" rtlCol="0" anchor="ctr"/>
           <a:lstStyle/>
           <a:p>
-            <a:pPr indent="0" marL="0">
+            <a:pPr marL="0" indent="0">
               <a:buNone/>
             </a:pPr>
             <a:r>
@@ -7117,7 +6980,7 @@
           <a:bodyPr wrap="square" lIns="0" tIns="0" rIns="0" bIns="0" rtlCol="0" anchor="ctr"/>
           <a:lstStyle/>
           <a:p>
-            <a:pPr indent="0" marL="0">
+            <a:pPr marL="0" indent="0">
               <a:buNone/>
             </a:pPr>
             <a:r>
@@ -7173,7 +7036,7 @@
           <a:bodyPr wrap="square" lIns="0" tIns="0" rIns="0" bIns="0" rtlCol="0" anchor="ctr"/>
           <a:lstStyle/>
           <a:p>
-            <a:pPr indent="0" marL="0">
+            <a:pPr marL="0" indent="0">
               <a:buNone/>
             </a:pPr>
             <a:r>
@@ -7209,7 +7072,7 @@
           <a:bodyPr wrap="square" lIns="0" tIns="0" rIns="0" bIns="0" rtlCol="0" anchor="ctr"/>
           <a:lstStyle/>
           <a:p>
-            <a:pPr indent="0" marL="0">
+            <a:pPr marL="0" indent="0">
               <a:buNone/>
             </a:pPr>
             <a:r>
@@ -7245,7 +7108,7 @@
           <a:bodyPr wrap="square" lIns="0" tIns="0" rIns="0" bIns="0" rtlCol="0" anchor="ctr"/>
           <a:lstStyle/>
           <a:p>
-            <a:pPr indent="0" marL="0">
+            <a:pPr marL="0" indent="0">
               <a:buNone/>
             </a:pPr>
             <a:r>
@@ -7279,7 +7142,7 @@
           </a:solidFill>
           <a:ln/>
           <a:effectLst>
-            <a:outerShdw sx="100000" sy="100000" kx="0" ky="0" algn="bl" rotWithShape="0" blurRad="76200" dist="25400" dir="8100000">
+            <a:outerShdw blurRad="76200" dist="25400" dir="8100000" algn="bl" rotWithShape="0">
               <a:srgbClr val="000000">
                 <a:alpha val="8000"/>
               </a:srgbClr>
@@ -7328,7 +7191,7 @@
           <a:bodyPr wrap="square" lIns="0" tIns="0" rIns="0" bIns="0" rtlCol="0" anchor="ctr"/>
           <a:lstStyle/>
           <a:p>
-            <a:pPr indent="0" marL="0">
+            <a:pPr marL="0" indent="0">
               <a:buNone/>
             </a:pPr>
             <a:r>
@@ -7364,7 +7227,7 @@
           <a:bodyPr wrap="square" lIns="0" tIns="0" rIns="0" bIns="0" rtlCol="0" anchor="ctr"/>
           <a:lstStyle/>
           <a:p>
-            <a:pPr indent="0" marL="0">
+            <a:pPr marL="0" indent="0">
               <a:buNone/>
             </a:pPr>
             <a:r>
@@ -7420,7 +7283,7 @@
           <a:bodyPr wrap="square" lIns="0" tIns="0" rIns="0" bIns="0" rtlCol="0" anchor="ctr"/>
           <a:lstStyle/>
           <a:p>
-            <a:pPr indent="0" marL="0">
+            <a:pPr marL="0" indent="0">
               <a:buNone/>
             </a:pPr>
             <a:r>
@@ -7456,7 +7319,7 @@
           <a:bodyPr wrap="square" lIns="0" tIns="0" rIns="0" bIns="0" rtlCol="0" anchor="ctr"/>
           <a:lstStyle/>
           <a:p>
-            <a:pPr indent="0" marL="0">
+            <a:pPr marL="0" indent="0">
               <a:buNone/>
             </a:pPr>
             <a:r>
@@ -7492,7 +7355,7 @@
           <a:bodyPr wrap="square" lIns="0" tIns="0" rIns="0" bIns="0" rtlCol="0" anchor="ctr"/>
           <a:lstStyle/>
           <a:p>
-            <a:pPr indent="0" marL="0">
+            <a:pPr marL="0" indent="0">
               <a:buNone/>
             </a:pPr>
             <a:r>
@@ -7526,7 +7389,7 @@
           </a:solidFill>
           <a:ln/>
           <a:effectLst>
-            <a:outerShdw sx="100000" sy="100000" kx="0" ky="0" algn="bl" rotWithShape="0" blurRad="76200" dist="25400" dir="8100000">
+            <a:outerShdw blurRad="76200" dist="25400" dir="8100000" algn="bl" rotWithShape="0">
               <a:srgbClr val="000000">
                 <a:alpha val="8000"/>
               </a:srgbClr>
@@ -7575,7 +7438,7 @@
           <a:bodyPr wrap="square" lIns="0" tIns="0" rIns="0" bIns="0" rtlCol="0" anchor="ctr"/>
           <a:lstStyle/>
           <a:p>
-            <a:pPr indent="0" marL="0">
+            <a:pPr marL="0" indent="0">
               <a:buNone/>
             </a:pPr>
             <a:r>
@@ -7611,7 +7474,7 @@
           <a:bodyPr wrap="square" lIns="0" tIns="0" rIns="0" bIns="0" rtlCol="0" anchor="ctr"/>
           <a:lstStyle/>
           <a:p>
-            <a:pPr indent="0" marL="0">
+            <a:pPr marL="0" indent="0">
               <a:buNone/>
             </a:pPr>
             <a:r>
@@ -7667,7 +7530,7 @@
           <a:bodyPr wrap="square" lIns="0" tIns="0" rIns="0" bIns="0" rtlCol="0" anchor="ctr"/>
           <a:lstStyle/>
           <a:p>
-            <a:pPr indent="0" marL="0">
+            <a:pPr marL="0" indent="0">
               <a:buNone/>
             </a:pPr>
             <a:r>
@@ -7703,7 +7566,7 @@
           <a:bodyPr wrap="square" lIns="0" tIns="0" rIns="0" bIns="0" rtlCol="0" anchor="ctr"/>
           <a:lstStyle/>
           <a:p>
-            <a:pPr indent="0" marL="0">
+            <a:pPr marL="0" indent="0">
               <a:buNone/>
             </a:pPr>
             <a:r>
@@ -7739,7 +7602,7 @@
           <a:bodyPr wrap="square" lIns="0" tIns="0" rIns="0" bIns="0" rtlCol="0" anchor="ctr"/>
           <a:lstStyle/>
           <a:p>
-            <a:pPr indent="0" marL="0">
+            <a:pPr marL="0" indent="0">
               <a:buNone/>
             </a:pPr>
             <a:r>
@@ -7773,7 +7636,7 @@
           </a:solidFill>
           <a:ln/>
           <a:effectLst>
-            <a:outerShdw sx="100000" sy="100000" kx="0" ky="0" algn="bl" rotWithShape="0" blurRad="76200" dist="25400" dir="8100000">
+            <a:outerShdw blurRad="76200" dist="25400" dir="8100000" algn="bl" rotWithShape="0">
               <a:srgbClr val="000000">
                 <a:alpha val="8000"/>
               </a:srgbClr>
@@ -7822,7 +7685,7 @@
           <a:bodyPr wrap="square" lIns="0" tIns="0" rIns="0" bIns="0" rtlCol="0" anchor="ctr"/>
           <a:lstStyle/>
           <a:p>
-            <a:pPr indent="0" marL="0">
+            <a:pPr marL="0" indent="0">
               <a:buNone/>
             </a:pPr>
             <a:r>
@@ -7858,7 +7721,7 @@
           <a:bodyPr wrap="square" lIns="0" tIns="0" rIns="0" bIns="0" rtlCol="0" anchor="ctr"/>
           <a:lstStyle/>
           <a:p>
-            <a:pPr indent="0" marL="0">
+            <a:pPr marL="0" indent="0">
               <a:buNone/>
             </a:pPr>
             <a:r>
@@ -7914,7 +7777,7 @@
           <a:bodyPr wrap="square" lIns="0" tIns="0" rIns="0" bIns="0" rtlCol="0" anchor="ctr"/>
           <a:lstStyle/>
           <a:p>
-            <a:pPr indent="0" marL="0">
+            <a:pPr marL="0" indent="0">
               <a:buNone/>
             </a:pPr>
             <a:r>
@@ -7950,7 +7813,7 @@
           <a:bodyPr wrap="square" lIns="0" tIns="0" rIns="0" bIns="0" rtlCol="0" anchor="ctr"/>
           <a:lstStyle/>
           <a:p>
-            <a:pPr indent="0" marL="0">
+            <a:pPr marL="0" indent="0">
               <a:buNone/>
             </a:pPr>
             <a:r>
@@ -7986,7 +7849,7 @@
           <a:bodyPr wrap="square" lIns="0" tIns="0" rIns="0" bIns="0" rtlCol="0" anchor="ctr"/>
           <a:lstStyle/>
           <a:p>
-            <a:pPr indent="0" marL="0">
+            <a:pPr marL="0" indent="0">
               <a:buNone/>
             </a:pPr>
             <a:r>
@@ -8020,7 +7883,7 @@
           </a:solidFill>
           <a:ln/>
           <a:effectLst>
-            <a:outerShdw sx="100000" sy="100000" kx="0" ky="0" algn="bl" rotWithShape="0" blurRad="76200" dist="25400" dir="8100000">
+            <a:outerShdw blurRad="76200" dist="25400" dir="8100000" algn="bl" rotWithShape="0">
               <a:srgbClr val="000000">
                 <a:alpha val="8000"/>
               </a:srgbClr>
@@ -8069,7 +7932,7 @@
           <a:bodyPr wrap="square" lIns="0" tIns="0" rIns="0" bIns="0" rtlCol="0" anchor="ctr"/>
           <a:lstStyle/>
           <a:p>
-            <a:pPr indent="0" marL="0">
+            <a:pPr marL="0" indent="0">
               <a:buNone/>
             </a:pPr>
             <a:r>
@@ -8105,7 +7968,7 @@
           <a:bodyPr wrap="square" lIns="0" tIns="0" rIns="0" bIns="0" rtlCol="0" anchor="ctr"/>
           <a:lstStyle/>
           <a:p>
-            <a:pPr indent="0" marL="0">
+            <a:pPr marL="0" indent="0">
               <a:buNone/>
             </a:pPr>
             <a:r>
@@ -8161,7 +8024,7 @@
           <a:bodyPr wrap="square" lIns="0" tIns="0" rIns="0" bIns="0" rtlCol="0" anchor="ctr"/>
           <a:lstStyle/>
           <a:p>
-            <a:pPr indent="0" marL="0">
+            <a:pPr marL="0" indent="0">
               <a:buNone/>
             </a:pPr>
             <a:r>
@@ -8197,7 +8060,7 @@
           <a:bodyPr wrap="square" lIns="0" tIns="0" rIns="0" bIns="0" rtlCol="0" anchor="ctr"/>
           <a:lstStyle/>
           <a:p>
-            <a:pPr indent="0" marL="0">
+            <a:pPr marL="0" indent="0">
               <a:buNone/>
             </a:pPr>
             <a:r>
@@ -8233,7 +8096,7 @@
           <a:bodyPr wrap="square" lIns="0" tIns="0" rIns="0" bIns="0" rtlCol="0" anchor="ctr"/>
           <a:lstStyle/>
           <a:p>
-            <a:pPr indent="0" marL="0">
+            <a:pPr marL="0" indent="0">
               <a:buNone/>
             </a:pPr>
             <a:r>
@@ -8264,6 +8127,7 @@
         <a:solidFill>
           <a:srgbClr val="F0F7FF"/>
         </a:solidFill>
+        <a:effectLst/>
       </p:bgPr>
     </p:bg>
     <p:spTree>
@@ -8341,7 +8205,7 @@
           <a:bodyPr wrap="square" lIns="0" tIns="0" rIns="0" bIns="0" rtlCol="0" anchor="ctr"/>
           <a:lstStyle/>
           <a:p>
-            <a:pPr indent="0" marL="0">
+            <a:pPr marL="0" indent="0">
               <a:buNone/>
             </a:pPr>
             <a:r>
@@ -8380,7 +8244,7 @@
           <a:bodyPr wrap="square" lIns="0" tIns="0" rIns="0" bIns="0" rtlCol="0" anchor="ctr"/>
           <a:lstStyle/>
           <a:p>
-            <a:pPr indent="0" marL="0">
+            <a:pPr marL="0" indent="0">
               <a:buNone/>
             </a:pPr>
             <a:r>
@@ -8419,7 +8283,7 @@
           <a:bodyPr wrap="square" rtlCol="0" anchor="ctr"/>
           <a:lstStyle/>
           <a:p>
-            <a:pPr algn="r" indent="0" marL="0">
+            <a:pPr marL="0" indent="0" algn="r">
               <a:buNone/>
             </a:pPr>
             <a:r>
@@ -8455,7 +8319,7 @@
           <a:bodyPr wrap="square" lIns="0" tIns="0" rIns="0" bIns="0" rtlCol="0" anchor="ctr"/>
           <a:lstStyle/>
           <a:p>
-            <a:pPr indent="0" marL="0">
+            <a:pPr marL="0" indent="0">
               <a:buNone/>
             </a:pPr>
             <a:r>
@@ -8472,7 +8336,7 @@
       </p:sp>
       <p:graphicFrame>
         <p:nvGraphicFramePr>
-          <p:cNvPr id="7" name="Table 0"/>
+          <p:cNvPr id="8" name="Table 0"/>
           <p:cNvGraphicFramePr>
             <a:graphicFrameLocks noGrp="1"/>
           </p:cNvGraphicFramePr>
@@ -8486,17 +8350,41 @@
         </p:nvGraphicFramePr>
         <p:xfrm>
           <a:off x="365760" y="1463040"/>
-          <a:ext cx="4023360" cy="3291840"/>
+          <a:ext cx="4023360" cy="3291834"/>
         </p:xfrm>
         <a:graphic>
           <a:graphicData uri="http://schemas.openxmlformats.org/drawingml/2006/table">
             <a:tbl>
               <a:tblPr/>
               <a:tblGrid>
-                <a:gridCol w="640080"/>
-                <a:gridCol w="1463040"/>
-                <a:gridCol w="822960"/>
-                <a:gridCol w="1097280"/>
+                <a:gridCol w="640080">
+                  <a:extLst>
+                    <a:ext uri="{9D8B030D-6E8A-4147-A177-3AD203B41FA5}">
+                      <a16:colId xmlns:a16="http://schemas.microsoft.com/office/drawing/2014/main" val="20000"/>
+                    </a:ext>
+                  </a:extLst>
+                </a:gridCol>
+                <a:gridCol w="1463040">
+                  <a:extLst>
+                    <a:ext uri="{9D8B030D-6E8A-4147-A177-3AD203B41FA5}">
+                      <a16:colId xmlns:a16="http://schemas.microsoft.com/office/drawing/2014/main" val="20001"/>
+                    </a:ext>
+                  </a:extLst>
+                </a:gridCol>
+                <a:gridCol w="822960">
+                  <a:extLst>
+                    <a:ext uri="{9D8B030D-6E8A-4147-A177-3AD203B41FA5}">
+                      <a16:colId xmlns:a16="http://schemas.microsoft.com/office/drawing/2014/main" val="20002"/>
+                    </a:ext>
+                  </a:extLst>
+                </a:gridCol>
+                <a:gridCol w="1097280">
+                  <a:extLst>
+                    <a:ext uri="{9D8B030D-6E8A-4147-A177-3AD203B41FA5}">
+                      <a16:colId xmlns:a16="http://schemas.microsoft.com/office/drawing/2014/main" val="20003"/>
+                    </a:ext>
+                  </a:extLst>
+                </a:gridCol>
               </a:tblGrid>
               <a:tr h="253218">
                 <a:tc>
@@ -8504,7 +8392,7 @@
                     <a:bodyPr/>
                     <a:lstStyle/>
                     <a:p>
-                      <a:pPr algn="ctr" indent="0" marL="0">
+                      <a:pPr marL="0" indent="0" algn="ctr">
                         <a:buNone/>
                       </a:pPr>
                       <a:r>
@@ -8518,7 +8406,7 @@
                       <a:endParaRPr lang="en-US" sz="900" dirty="0"/>
                     </a:p>
                   </a:txBody>
-                  <a:tcPr marL="91440" marR="91440" marT="45720" marB="45720">
+                  <a:tcPr>
                     <a:lnL w="5080" cap="flat" cmpd="sng" algn="ctr">
                       <a:solidFill>
                         <a:srgbClr val="CBD5E1"/>
@@ -8565,7 +8453,7 @@
                     <a:bodyPr/>
                     <a:lstStyle/>
                     <a:p>
-                      <a:pPr algn="l" indent="0" marL="0">
+                      <a:pPr marL="0" indent="0" algn="l">
                         <a:buNone/>
                       </a:pPr>
                       <a:r>
@@ -8579,7 +8467,7 @@
                       <a:endParaRPr lang="en-US" sz="900" dirty="0"/>
                     </a:p>
                   </a:txBody>
-                  <a:tcPr marL="91440" marR="91440" marT="45720" marB="45720">
+                  <a:tcPr>
                     <a:lnL w="5080" cap="flat" cmpd="sng" algn="ctr">
                       <a:solidFill>
                         <a:srgbClr val="CBD5E1"/>
@@ -8626,7 +8514,7 @@
                     <a:bodyPr/>
                     <a:lstStyle/>
                     <a:p>
-                      <a:pPr algn="l" indent="0" marL="0">
+                      <a:pPr marL="0" indent="0" algn="l">
                         <a:buNone/>
                       </a:pPr>
                       <a:r>
@@ -8640,7 +8528,7 @@
                       <a:endParaRPr lang="en-US" sz="900" dirty="0"/>
                     </a:p>
                   </a:txBody>
-                  <a:tcPr marL="91440" marR="91440" marT="45720" marB="45720">
+                  <a:tcPr>
                     <a:lnL w="5080" cap="flat" cmpd="sng" algn="ctr">
                       <a:solidFill>
                         <a:srgbClr val="CBD5E1"/>
@@ -8687,7 +8575,7 @@
                     <a:bodyPr/>
                     <a:lstStyle/>
                     <a:p>
-                      <a:pPr algn="l" indent="0" marL="0">
+                      <a:pPr marL="0" indent="0" algn="l">
                         <a:buNone/>
                       </a:pPr>
                       <a:r>
@@ -8701,7 +8589,7 @@
                       <a:endParaRPr lang="en-US" sz="900" dirty="0"/>
                     </a:p>
                   </a:txBody>
-                  <a:tcPr marL="91440" marR="91440" marT="45720" marB="45720">
+                  <a:tcPr>
                     <a:lnL w="5080" cap="flat" cmpd="sng" algn="ctr">
                       <a:solidFill>
                         <a:srgbClr val="CBD5E1"/>
@@ -8743,6 +8631,11 @@
                     </a:solidFill>
                   </a:tcPr>
                 </a:tc>
+                <a:extLst>
+                  <a:ext uri="{0D108BD9-81ED-4DB2-BD59-A6C34878D82A}">
+                    <a16:rowId xmlns:a16="http://schemas.microsoft.com/office/drawing/2014/main" val="10000"/>
+                  </a:ext>
+                </a:extLst>
               </a:tr>
               <a:tr h="253218">
                 <a:tc>
@@ -8750,7 +8643,7 @@
                     <a:bodyPr/>
                     <a:lstStyle/>
                     <a:p>
-                      <a:pPr algn="ctr" indent="0" marL="0">
+                      <a:pPr marL="0" indent="0" algn="ctr">
                         <a:buNone/>
                       </a:pPr>
                       <a:r>
@@ -8764,7 +8657,7 @@
                       <a:endParaRPr lang="en-US" sz="900" dirty="0"/>
                     </a:p>
                   </a:txBody>
-                  <a:tcPr marL="91440" marR="91440" marT="45720" marB="45720">
+                  <a:tcPr>
                     <a:lnL w="5080" cap="flat" cmpd="sng" algn="ctr">
                       <a:solidFill>
                         <a:srgbClr val="CBD5E1"/>
@@ -8811,7 +8704,7 @@
                     <a:bodyPr/>
                     <a:lstStyle/>
                     <a:p>
-                      <a:pPr algn="l" indent="0" marL="0">
+                      <a:pPr marL="0" indent="0" algn="l">
                         <a:buNone/>
                       </a:pPr>
                       <a:r>
@@ -8825,7 +8718,7 @@
                       <a:endParaRPr lang="en-US" sz="900" dirty="0"/>
                     </a:p>
                   </a:txBody>
-                  <a:tcPr marL="91440" marR="91440" marT="45720" marB="45720">
+                  <a:tcPr>
                     <a:lnL w="5080" cap="flat" cmpd="sng" algn="ctr">
                       <a:solidFill>
                         <a:srgbClr val="CBD5E1"/>
@@ -8872,7 +8765,7 @@
                     <a:bodyPr/>
                     <a:lstStyle/>
                     <a:p>
-                      <a:pPr algn="l" indent="0" marL="0">
+                      <a:pPr marL="0" indent="0" algn="l">
                         <a:buNone/>
                       </a:pPr>
                       <a:r>
@@ -8886,7 +8779,7 @@
                       <a:endParaRPr lang="en-US" sz="900" dirty="0"/>
                     </a:p>
                   </a:txBody>
-                  <a:tcPr marL="91440" marR="91440" marT="45720" marB="45720">
+                  <a:tcPr>
                     <a:lnL w="5080" cap="flat" cmpd="sng" algn="ctr">
                       <a:solidFill>
                         <a:srgbClr val="CBD5E1"/>
@@ -8933,7 +8826,7 @@
                     <a:bodyPr/>
                     <a:lstStyle/>
                     <a:p>
-                      <a:pPr algn="l" indent="0" marL="0">
+                      <a:pPr marL="0" indent="0" algn="l">
                         <a:buNone/>
                       </a:pPr>
                       <a:r>
@@ -8947,7 +8840,7 @@
                       <a:endParaRPr lang="en-US" sz="900" dirty="0"/>
                     </a:p>
                   </a:txBody>
-                  <a:tcPr marL="91440" marR="91440" marT="45720" marB="45720">
+                  <a:tcPr>
                     <a:lnL w="5080" cap="flat" cmpd="sng" algn="ctr">
                       <a:solidFill>
                         <a:srgbClr val="CBD5E1"/>
@@ -8989,6 +8882,11 @@
                     </a:solidFill>
                   </a:tcPr>
                 </a:tc>
+                <a:extLst>
+                  <a:ext uri="{0D108BD9-81ED-4DB2-BD59-A6C34878D82A}">
+                    <a16:rowId xmlns:a16="http://schemas.microsoft.com/office/drawing/2014/main" val="10001"/>
+                  </a:ext>
+                </a:extLst>
               </a:tr>
               <a:tr h="253218">
                 <a:tc>
@@ -8996,7 +8894,7 @@
                     <a:bodyPr/>
                     <a:lstStyle/>
                     <a:p>
-                      <a:pPr algn="ctr" indent="0" marL="0">
+                      <a:pPr marL="0" indent="0" algn="ctr">
                         <a:buNone/>
                       </a:pPr>
                       <a:r>
@@ -9010,7 +8908,7 @@
                       <a:endParaRPr lang="en-US" sz="900" dirty="0"/>
                     </a:p>
                   </a:txBody>
-                  <a:tcPr marL="91440" marR="91440" marT="45720" marB="45720">
+                  <a:tcPr>
                     <a:lnL w="5080" cap="flat" cmpd="sng" algn="ctr">
                       <a:solidFill>
                         <a:srgbClr val="CBD5E1"/>
@@ -9057,7 +8955,7 @@
                     <a:bodyPr/>
                     <a:lstStyle/>
                     <a:p>
-                      <a:pPr algn="l" indent="0" marL="0">
+                      <a:pPr marL="0" indent="0" algn="l">
                         <a:buNone/>
                       </a:pPr>
                       <a:r>
@@ -9071,7 +8969,7 @@
                       <a:endParaRPr lang="en-US" sz="900" dirty="0"/>
                     </a:p>
                   </a:txBody>
-                  <a:tcPr marL="91440" marR="91440" marT="45720" marB="45720">
+                  <a:tcPr>
                     <a:lnL w="5080" cap="flat" cmpd="sng" algn="ctr">
                       <a:solidFill>
                         <a:srgbClr val="CBD5E1"/>
@@ -9118,7 +9016,7 @@
                     <a:bodyPr/>
                     <a:lstStyle/>
                     <a:p>
-                      <a:pPr algn="l" indent="0" marL="0">
+                      <a:pPr marL="0" indent="0" algn="l">
                         <a:buNone/>
                       </a:pPr>
                       <a:r>
@@ -9132,7 +9030,7 @@
                       <a:endParaRPr lang="en-US" sz="900" dirty="0"/>
                     </a:p>
                   </a:txBody>
-                  <a:tcPr marL="91440" marR="91440" marT="45720" marB="45720">
+                  <a:tcPr>
                     <a:lnL w="5080" cap="flat" cmpd="sng" algn="ctr">
                       <a:solidFill>
                         <a:srgbClr val="CBD5E1"/>
@@ -9179,7 +9077,7 @@
                     <a:bodyPr/>
                     <a:lstStyle/>
                     <a:p>
-                      <a:pPr algn="l" indent="0" marL="0">
+                      <a:pPr marL="0" indent="0" algn="l">
                         <a:buNone/>
                       </a:pPr>
                       <a:r>
@@ -9193,7 +9091,7 @@
                       <a:endParaRPr lang="en-US" sz="900" dirty="0"/>
                     </a:p>
                   </a:txBody>
-                  <a:tcPr marL="91440" marR="91440" marT="45720" marB="45720">
+                  <a:tcPr>
                     <a:lnL w="5080" cap="flat" cmpd="sng" algn="ctr">
                       <a:solidFill>
                         <a:srgbClr val="CBD5E1"/>
@@ -9235,6 +9133,11 @@
                     </a:solidFill>
                   </a:tcPr>
                 </a:tc>
+                <a:extLst>
+                  <a:ext uri="{0D108BD9-81ED-4DB2-BD59-A6C34878D82A}">
+                    <a16:rowId xmlns:a16="http://schemas.microsoft.com/office/drawing/2014/main" val="10002"/>
+                  </a:ext>
+                </a:extLst>
               </a:tr>
               <a:tr h="253218">
                 <a:tc>
@@ -9242,7 +9145,7 @@
                     <a:bodyPr/>
                     <a:lstStyle/>
                     <a:p>
-                      <a:pPr algn="ctr" indent="0" marL="0">
+                      <a:pPr marL="0" indent="0" algn="ctr">
                         <a:buNone/>
                       </a:pPr>
                       <a:r>
@@ -9256,7 +9159,7 @@
                       <a:endParaRPr lang="en-US" sz="900" dirty="0"/>
                     </a:p>
                   </a:txBody>
-                  <a:tcPr marL="91440" marR="91440" marT="45720" marB="45720">
+                  <a:tcPr>
                     <a:lnL w="5080" cap="flat" cmpd="sng" algn="ctr">
                       <a:solidFill>
                         <a:srgbClr val="CBD5E1"/>
@@ -9303,7 +9206,7 @@
                     <a:bodyPr/>
                     <a:lstStyle/>
                     <a:p>
-                      <a:pPr algn="l" indent="0" marL="0">
+                      <a:pPr marL="0" indent="0" algn="l">
                         <a:buNone/>
                       </a:pPr>
                       <a:r>
@@ -9317,7 +9220,7 @@
                       <a:endParaRPr lang="en-US" sz="900" dirty="0"/>
                     </a:p>
                   </a:txBody>
-                  <a:tcPr marL="91440" marR="91440" marT="45720" marB="45720">
+                  <a:tcPr>
                     <a:lnL w="5080" cap="flat" cmpd="sng" algn="ctr">
                       <a:solidFill>
                         <a:srgbClr val="CBD5E1"/>
@@ -9364,7 +9267,7 @@
                     <a:bodyPr/>
                     <a:lstStyle/>
                     <a:p>
-                      <a:pPr algn="l" indent="0" marL="0">
+                      <a:pPr marL="0" indent="0" algn="l">
                         <a:buNone/>
                       </a:pPr>
                       <a:r>
@@ -9378,7 +9281,7 @@
                       <a:endParaRPr lang="en-US" sz="900" dirty="0"/>
                     </a:p>
                   </a:txBody>
-                  <a:tcPr marL="91440" marR="91440" marT="45720" marB="45720">
+                  <a:tcPr>
                     <a:lnL w="5080" cap="flat" cmpd="sng" algn="ctr">
                       <a:solidFill>
                         <a:srgbClr val="CBD5E1"/>
@@ -9425,7 +9328,7 @@
                     <a:bodyPr/>
                     <a:lstStyle/>
                     <a:p>
-                      <a:pPr algn="l" indent="0" marL="0">
+                      <a:pPr marL="0" indent="0" algn="l">
                         <a:buNone/>
                       </a:pPr>
                       <a:r>
@@ -9439,7 +9342,7 @@
                       <a:endParaRPr lang="en-US" sz="900" dirty="0"/>
                     </a:p>
                   </a:txBody>
-                  <a:tcPr marL="91440" marR="91440" marT="45720" marB="45720">
+                  <a:tcPr>
                     <a:lnL w="5080" cap="flat" cmpd="sng" algn="ctr">
                       <a:solidFill>
                         <a:srgbClr val="CBD5E1"/>
@@ -9481,6 +9384,11 @@
                     </a:solidFill>
                   </a:tcPr>
                 </a:tc>
+                <a:extLst>
+                  <a:ext uri="{0D108BD9-81ED-4DB2-BD59-A6C34878D82A}">
+                    <a16:rowId xmlns:a16="http://schemas.microsoft.com/office/drawing/2014/main" val="10003"/>
+                  </a:ext>
+                </a:extLst>
               </a:tr>
               <a:tr h="253218">
                 <a:tc>
@@ -9488,7 +9396,7 @@
                     <a:bodyPr/>
                     <a:lstStyle/>
                     <a:p>
-                      <a:pPr algn="ctr" indent="0" marL="0">
+                      <a:pPr marL="0" indent="0" algn="ctr">
                         <a:buNone/>
                       </a:pPr>
                       <a:r>
@@ -9502,7 +9410,7 @@
                       <a:endParaRPr lang="en-US" sz="900" dirty="0"/>
                     </a:p>
                   </a:txBody>
-                  <a:tcPr marL="91440" marR="91440" marT="45720" marB="45720">
+                  <a:tcPr>
                     <a:lnL w="5080" cap="flat" cmpd="sng" algn="ctr">
                       <a:solidFill>
                         <a:srgbClr val="CBD5E1"/>
@@ -9549,7 +9457,7 @@
                     <a:bodyPr/>
                     <a:lstStyle/>
                     <a:p>
-                      <a:pPr algn="l" indent="0" marL="0">
+                      <a:pPr marL="0" indent="0" algn="l">
                         <a:buNone/>
                       </a:pPr>
                       <a:r>
@@ -9563,7 +9471,7 @@
                       <a:endParaRPr lang="en-US" sz="900" dirty="0"/>
                     </a:p>
                   </a:txBody>
-                  <a:tcPr marL="91440" marR="91440" marT="45720" marB="45720">
+                  <a:tcPr>
                     <a:lnL w="5080" cap="flat" cmpd="sng" algn="ctr">
                       <a:solidFill>
                         <a:srgbClr val="CBD5E1"/>
@@ -9610,7 +9518,7 @@
                     <a:bodyPr/>
                     <a:lstStyle/>
                     <a:p>
-                      <a:pPr algn="l" indent="0" marL="0">
+                      <a:pPr marL="0" indent="0" algn="l">
                         <a:buNone/>
                       </a:pPr>
                       <a:r>
@@ -9624,7 +9532,7 @@
                       <a:endParaRPr lang="en-US" sz="900" dirty="0"/>
                     </a:p>
                   </a:txBody>
-                  <a:tcPr marL="91440" marR="91440" marT="45720" marB="45720">
+                  <a:tcPr>
                     <a:lnL w="5080" cap="flat" cmpd="sng" algn="ctr">
                       <a:solidFill>
                         <a:srgbClr val="CBD5E1"/>
@@ -9671,7 +9579,7 @@
                     <a:bodyPr/>
                     <a:lstStyle/>
                     <a:p>
-                      <a:pPr algn="l" indent="0" marL="0">
+                      <a:pPr marL="0" indent="0" algn="l">
                         <a:buNone/>
                       </a:pPr>
                       <a:r>
@@ -9685,7 +9593,7 @@
                       <a:endParaRPr lang="en-US" sz="900" dirty="0"/>
                     </a:p>
                   </a:txBody>
-                  <a:tcPr marL="91440" marR="91440" marT="45720" marB="45720">
+                  <a:tcPr>
                     <a:lnL w="5080" cap="flat" cmpd="sng" algn="ctr">
                       <a:solidFill>
                         <a:srgbClr val="CBD5E1"/>
@@ -9727,6 +9635,11 @@
                     </a:solidFill>
                   </a:tcPr>
                 </a:tc>
+                <a:extLst>
+                  <a:ext uri="{0D108BD9-81ED-4DB2-BD59-A6C34878D82A}">
+                    <a16:rowId xmlns:a16="http://schemas.microsoft.com/office/drawing/2014/main" val="10004"/>
+                  </a:ext>
+                </a:extLst>
               </a:tr>
               <a:tr h="253218">
                 <a:tc>
@@ -9734,7 +9647,7 @@
                     <a:bodyPr/>
                     <a:lstStyle/>
                     <a:p>
-                      <a:pPr algn="ctr" indent="0" marL="0">
+                      <a:pPr marL="0" indent="0" algn="ctr">
                         <a:buNone/>
                       </a:pPr>
                       <a:r>
@@ -9748,7 +9661,7 @@
                       <a:endParaRPr lang="en-US" sz="900" dirty="0"/>
                     </a:p>
                   </a:txBody>
-                  <a:tcPr marL="91440" marR="91440" marT="45720" marB="45720">
+                  <a:tcPr>
                     <a:lnL w="5080" cap="flat" cmpd="sng" algn="ctr">
                       <a:solidFill>
                         <a:srgbClr val="CBD5E1"/>
@@ -9795,7 +9708,7 @@
                     <a:bodyPr/>
                     <a:lstStyle/>
                     <a:p>
-                      <a:pPr algn="l" indent="0" marL="0">
+                      <a:pPr marL="0" indent="0" algn="l">
                         <a:buNone/>
                       </a:pPr>
                       <a:r>
@@ -9809,7 +9722,7 @@
                       <a:endParaRPr lang="en-US" sz="900" dirty="0"/>
                     </a:p>
                   </a:txBody>
-                  <a:tcPr marL="91440" marR="91440" marT="45720" marB="45720">
+                  <a:tcPr>
                     <a:lnL w="5080" cap="flat" cmpd="sng" algn="ctr">
                       <a:solidFill>
                         <a:srgbClr val="CBD5E1"/>
@@ -9856,7 +9769,7 @@
                     <a:bodyPr/>
                     <a:lstStyle/>
                     <a:p>
-                      <a:pPr algn="l" indent="0" marL="0">
+                      <a:pPr marL="0" indent="0" algn="l">
                         <a:buNone/>
                       </a:pPr>
                       <a:r>
@@ -9870,7 +9783,7 @@
                       <a:endParaRPr lang="en-US" sz="900" dirty="0"/>
                     </a:p>
                   </a:txBody>
-                  <a:tcPr marL="91440" marR="91440" marT="45720" marB="45720">
+                  <a:tcPr>
                     <a:lnL w="5080" cap="flat" cmpd="sng" algn="ctr">
                       <a:solidFill>
                         <a:srgbClr val="CBD5E1"/>
@@ -9917,7 +9830,7 @@
                     <a:bodyPr/>
                     <a:lstStyle/>
                     <a:p>
-                      <a:pPr algn="l" indent="0" marL="0">
+                      <a:pPr marL="0" indent="0" algn="l">
                         <a:buNone/>
                       </a:pPr>
                       <a:r>
@@ -9931,7 +9844,7 @@
                       <a:endParaRPr lang="en-US" sz="900" dirty="0"/>
                     </a:p>
                   </a:txBody>
-                  <a:tcPr marL="91440" marR="91440" marT="45720" marB="45720">
+                  <a:tcPr>
                     <a:lnL w="5080" cap="flat" cmpd="sng" algn="ctr">
                       <a:solidFill>
                         <a:srgbClr val="CBD5E1"/>
@@ -9973,6 +9886,11 @@
                     </a:solidFill>
                   </a:tcPr>
                 </a:tc>
+                <a:extLst>
+                  <a:ext uri="{0D108BD9-81ED-4DB2-BD59-A6C34878D82A}">
+                    <a16:rowId xmlns:a16="http://schemas.microsoft.com/office/drawing/2014/main" val="10005"/>
+                  </a:ext>
+                </a:extLst>
               </a:tr>
               <a:tr h="253218">
                 <a:tc>
@@ -9980,7 +9898,7 @@
                     <a:bodyPr/>
                     <a:lstStyle/>
                     <a:p>
-                      <a:pPr algn="ctr" indent="0" marL="0">
+                      <a:pPr marL="0" indent="0" algn="ctr">
                         <a:buNone/>
                       </a:pPr>
                       <a:r>
@@ -9994,7 +9912,7 @@
                       <a:endParaRPr lang="en-US" sz="900" dirty="0"/>
                     </a:p>
                   </a:txBody>
-                  <a:tcPr marL="91440" marR="91440" marT="45720" marB="45720">
+                  <a:tcPr>
                     <a:lnL w="5080" cap="flat" cmpd="sng" algn="ctr">
                       <a:solidFill>
                         <a:srgbClr val="CBD5E1"/>
@@ -10041,7 +9959,7 @@
                     <a:bodyPr/>
                     <a:lstStyle/>
                     <a:p>
-                      <a:pPr algn="l" indent="0" marL="0">
+                      <a:pPr marL="0" indent="0" algn="l">
                         <a:buNone/>
                       </a:pPr>
                       <a:r>
@@ -10055,7 +9973,7 @@
                       <a:endParaRPr lang="en-US" sz="900" dirty="0"/>
                     </a:p>
                   </a:txBody>
-                  <a:tcPr marL="91440" marR="91440" marT="45720" marB="45720">
+                  <a:tcPr>
                     <a:lnL w="5080" cap="flat" cmpd="sng" algn="ctr">
                       <a:solidFill>
                         <a:srgbClr val="CBD5E1"/>
@@ -10102,7 +10020,7 @@
                     <a:bodyPr/>
                     <a:lstStyle/>
                     <a:p>
-                      <a:pPr algn="l" indent="0" marL="0">
+                      <a:pPr marL="0" indent="0" algn="l">
                         <a:buNone/>
                       </a:pPr>
                       <a:r>
@@ -10116,7 +10034,7 @@
                       <a:endParaRPr lang="en-US" sz="900" dirty="0"/>
                     </a:p>
                   </a:txBody>
-                  <a:tcPr marL="91440" marR="91440" marT="45720" marB="45720">
+                  <a:tcPr>
                     <a:lnL w="5080" cap="flat" cmpd="sng" algn="ctr">
                       <a:solidFill>
                         <a:srgbClr val="CBD5E1"/>
@@ -10163,7 +10081,7 @@
                     <a:bodyPr/>
                     <a:lstStyle/>
                     <a:p>
-                      <a:pPr algn="l" indent="0" marL="0">
+                      <a:pPr marL="0" indent="0" algn="l">
                         <a:buNone/>
                       </a:pPr>
                       <a:r>
@@ -10177,7 +10095,7 @@
                       <a:endParaRPr lang="en-US" sz="900" dirty="0"/>
                     </a:p>
                   </a:txBody>
-                  <a:tcPr marL="91440" marR="91440" marT="45720" marB="45720">
+                  <a:tcPr>
                     <a:lnL w="5080" cap="flat" cmpd="sng" algn="ctr">
                       <a:solidFill>
                         <a:srgbClr val="CBD5E1"/>
@@ -10219,6 +10137,11 @@
                     </a:solidFill>
                   </a:tcPr>
                 </a:tc>
+                <a:extLst>
+                  <a:ext uri="{0D108BD9-81ED-4DB2-BD59-A6C34878D82A}">
+                    <a16:rowId xmlns:a16="http://schemas.microsoft.com/office/drawing/2014/main" val="10006"/>
+                  </a:ext>
+                </a:extLst>
               </a:tr>
               <a:tr h="253218">
                 <a:tc>
@@ -10226,7 +10149,7 @@
                     <a:bodyPr/>
                     <a:lstStyle/>
                     <a:p>
-                      <a:pPr algn="ctr" indent="0" marL="0">
+                      <a:pPr marL="0" indent="0" algn="ctr">
                         <a:buNone/>
                       </a:pPr>
                       <a:r>
@@ -10240,7 +10163,7 @@
                       <a:endParaRPr lang="en-US" sz="900" dirty="0"/>
                     </a:p>
                   </a:txBody>
-                  <a:tcPr marL="91440" marR="91440" marT="45720" marB="45720">
+                  <a:tcPr>
                     <a:lnL w="5080" cap="flat" cmpd="sng" algn="ctr">
                       <a:solidFill>
                         <a:srgbClr val="CBD5E1"/>
@@ -10287,7 +10210,7 @@
                     <a:bodyPr/>
                     <a:lstStyle/>
                     <a:p>
-                      <a:pPr algn="l" indent="0" marL="0">
+                      <a:pPr marL="0" indent="0" algn="l">
                         <a:buNone/>
                       </a:pPr>
                       <a:r>
@@ -10301,7 +10224,7 @@
                       <a:endParaRPr lang="en-US" sz="900" dirty="0"/>
                     </a:p>
                   </a:txBody>
-                  <a:tcPr marL="91440" marR="91440" marT="45720" marB="45720">
+                  <a:tcPr>
                     <a:lnL w="5080" cap="flat" cmpd="sng" algn="ctr">
                       <a:solidFill>
                         <a:srgbClr val="CBD5E1"/>
@@ -10348,7 +10271,7 @@
                     <a:bodyPr/>
                     <a:lstStyle/>
                     <a:p>
-                      <a:pPr algn="l" indent="0" marL="0">
+                      <a:pPr marL="0" indent="0" algn="l">
                         <a:buNone/>
                       </a:pPr>
                       <a:r>
@@ -10362,7 +10285,7 @@
                       <a:endParaRPr lang="en-US" sz="900" dirty="0"/>
                     </a:p>
                   </a:txBody>
-                  <a:tcPr marL="91440" marR="91440" marT="45720" marB="45720">
+                  <a:tcPr>
                     <a:lnL w="5080" cap="flat" cmpd="sng" algn="ctr">
                       <a:solidFill>
                         <a:srgbClr val="CBD5E1"/>
@@ -10409,7 +10332,7 @@
                     <a:bodyPr/>
                     <a:lstStyle/>
                     <a:p>
-                      <a:pPr algn="l" indent="0" marL="0">
+                      <a:pPr marL="0" indent="0" algn="l">
                         <a:buNone/>
                       </a:pPr>
                       <a:r>
@@ -10423,7 +10346,7 @@
                       <a:endParaRPr lang="en-US" sz="900" dirty="0"/>
                     </a:p>
                   </a:txBody>
-                  <a:tcPr marL="91440" marR="91440" marT="45720" marB="45720">
+                  <a:tcPr>
                     <a:lnL w="5080" cap="flat" cmpd="sng" algn="ctr">
                       <a:solidFill>
                         <a:srgbClr val="CBD5E1"/>
@@ -10465,6 +10388,11 @@
                     </a:solidFill>
                   </a:tcPr>
                 </a:tc>
+                <a:extLst>
+                  <a:ext uri="{0D108BD9-81ED-4DB2-BD59-A6C34878D82A}">
+                    <a16:rowId xmlns:a16="http://schemas.microsoft.com/office/drawing/2014/main" val="10007"/>
+                  </a:ext>
+                </a:extLst>
               </a:tr>
               <a:tr h="253218">
                 <a:tc>
@@ -10472,7 +10400,7 @@
                     <a:bodyPr/>
                     <a:lstStyle/>
                     <a:p>
-                      <a:pPr algn="ctr" indent="0" marL="0">
+                      <a:pPr marL="0" indent="0" algn="ctr">
                         <a:buNone/>
                       </a:pPr>
                       <a:r>
@@ -10486,7 +10414,7 @@
                       <a:endParaRPr lang="en-US" sz="900" dirty="0"/>
                     </a:p>
                   </a:txBody>
-                  <a:tcPr marL="91440" marR="91440" marT="45720" marB="45720">
+                  <a:tcPr>
                     <a:lnL w="5080" cap="flat" cmpd="sng" algn="ctr">
                       <a:solidFill>
                         <a:srgbClr val="CBD5E1"/>
@@ -10533,7 +10461,7 @@
                     <a:bodyPr/>
                     <a:lstStyle/>
                     <a:p>
-                      <a:pPr algn="l" indent="0" marL="0">
+                      <a:pPr marL="0" indent="0" algn="l">
                         <a:buNone/>
                       </a:pPr>
                       <a:r>
@@ -10547,7 +10475,7 @@
                       <a:endParaRPr lang="en-US" sz="900" dirty="0"/>
                     </a:p>
                   </a:txBody>
-                  <a:tcPr marL="91440" marR="91440" marT="45720" marB="45720">
+                  <a:tcPr>
                     <a:lnL w="5080" cap="flat" cmpd="sng" algn="ctr">
                       <a:solidFill>
                         <a:srgbClr val="CBD5E1"/>
@@ -10594,7 +10522,7 @@
                     <a:bodyPr/>
                     <a:lstStyle/>
                     <a:p>
-                      <a:pPr algn="l" indent="0" marL="0">
+                      <a:pPr marL="0" indent="0" algn="l">
                         <a:buNone/>
                       </a:pPr>
                       <a:r>
@@ -10608,7 +10536,7 @@
                       <a:endParaRPr lang="en-US" sz="900" dirty="0"/>
                     </a:p>
                   </a:txBody>
-                  <a:tcPr marL="91440" marR="91440" marT="45720" marB="45720">
+                  <a:tcPr>
                     <a:lnL w="5080" cap="flat" cmpd="sng" algn="ctr">
                       <a:solidFill>
                         <a:srgbClr val="CBD5E1"/>
@@ -10655,7 +10583,7 @@
                     <a:bodyPr/>
                     <a:lstStyle/>
                     <a:p>
-                      <a:pPr algn="l" indent="0" marL="0">
+                      <a:pPr marL="0" indent="0" algn="l">
                         <a:buNone/>
                       </a:pPr>
                       <a:r>
@@ -10669,7 +10597,7 @@
                       <a:endParaRPr lang="en-US" sz="900" dirty="0"/>
                     </a:p>
                   </a:txBody>
-                  <a:tcPr marL="91440" marR="91440" marT="45720" marB="45720">
+                  <a:tcPr>
                     <a:lnL w="5080" cap="flat" cmpd="sng" algn="ctr">
                       <a:solidFill>
                         <a:srgbClr val="CBD5E1"/>
@@ -10711,6 +10639,11 @@
                     </a:solidFill>
                   </a:tcPr>
                 </a:tc>
+                <a:extLst>
+                  <a:ext uri="{0D108BD9-81ED-4DB2-BD59-A6C34878D82A}">
+                    <a16:rowId xmlns:a16="http://schemas.microsoft.com/office/drawing/2014/main" val="10008"/>
+                  </a:ext>
+                </a:extLst>
               </a:tr>
               <a:tr h="253218">
                 <a:tc>
@@ -10718,7 +10651,7 @@
                     <a:bodyPr/>
                     <a:lstStyle/>
                     <a:p>
-                      <a:pPr algn="ctr" indent="0" marL="0">
+                      <a:pPr marL="0" indent="0" algn="ctr">
                         <a:buNone/>
                       </a:pPr>
                       <a:r>
@@ -10732,7 +10665,7 @@
                       <a:endParaRPr lang="en-US" sz="900" dirty="0"/>
                     </a:p>
                   </a:txBody>
-                  <a:tcPr marL="91440" marR="91440" marT="45720" marB="45720">
+                  <a:tcPr>
                     <a:lnL w="5080" cap="flat" cmpd="sng" algn="ctr">
                       <a:solidFill>
                         <a:srgbClr val="CBD5E1"/>
@@ -10779,7 +10712,7 @@
                     <a:bodyPr/>
                     <a:lstStyle/>
                     <a:p>
-                      <a:pPr algn="l" indent="0" marL="0">
+                      <a:pPr marL="0" indent="0" algn="l">
                         <a:buNone/>
                       </a:pPr>
                       <a:r>
@@ -10793,7 +10726,7 @@
                       <a:endParaRPr lang="en-US" sz="900" dirty="0"/>
                     </a:p>
                   </a:txBody>
-                  <a:tcPr marL="91440" marR="91440" marT="45720" marB="45720">
+                  <a:tcPr>
                     <a:lnL w="5080" cap="flat" cmpd="sng" algn="ctr">
                       <a:solidFill>
                         <a:srgbClr val="CBD5E1"/>
@@ -10840,7 +10773,7 @@
                     <a:bodyPr/>
                     <a:lstStyle/>
                     <a:p>
-                      <a:pPr algn="l" indent="0" marL="0">
+                      <a:pPr marL="0" indent="0" algn="l">
                         <a:buNone/>
                       </a:pPr>
                       <a:r>
@@ -10854,7 +10787,7 @@
                       <a:endParaRPr lang="en-US" sz="900" dirty="0"/>
                     </a:p>
                   </a:txBody>
-                  <a:tcPr marL="91440" marR="91440" marT="45720" marB="45720">
+                  <a:tcPr>
                     <a:lnL w="5080" cap="flat" cmpd="sng" algn="ctr">
                       <a:solidFill>
                         <a:srgbClr val="CBD5E1"/>
@@ -10901,7 +10834,7 @@
                     <a:bodyPr/>
                     <a:lstStyle/>
                     <a:p>
-                      <a:pPr algn="l" indent="0" marL="0">
+                      <a:pPr marL="0" indent="0" algn="l">
                         <a:buNone/>
                       </a:pPr>
                       <a:r>
@@ -10915,7 +10848,7 @@
                       <a:endParaRPr lang="en-US" sz="900" dirty="0"/>
                     </a:p>
                   </a:txBody>
-                  <a:tcPr marL="91440" marR="91440" marT="45720" marB="45720">
+                  <a:tcPr>
                     <a:lnL w="5080" cap="flat" cmpd="sng" algn="ctr">
                       <a:solidFill>
                         <a:srgbClr val="CBD5E1"/>
@@ -10957,6 +10890,11 @@
                     </a:solidFill>
                   </a:tcPr>
                 </a:tc>
+                <a:extLst>
+                  <a:ext uri="{0D108BD9-81ED-4DB2-BD59-A6C34878D82A}">
+                    <a16:rowId xmlns:a16="http://schemas.microsoft.com/office/drawing/2014/main" val="10009"/>
+                  </a:ext>
+                </a:extLst>
               </a:tr>
               <a:tr h="253218">
                 <a:tc>
@@ -10964,7 +10902,7 @@
                     <a:bodyPr/>
                     <a:lstStyle/>
                     <a:p>
-                      <a:pPr algn="ctr" indent="0" marL="0">
+                      <a:pPr marL="0" indent="0" algn="ctr">
                         <a:buNone/>
                       </a:pPr>
                       <a:r>
@@ -10978,7 +10916,7 @@
                       <a:endParaRPr lang="en-US" sz="900" dirty="0"/>
                     </a:p>
                   </a:txBody>
-                  <a:tcPr marL="91440" marR="91440" marT="45720" marB="45720">
+                  <a:tcPr>
                     <a:lnL w="5080" cap="flat" cmpd="sng" algn="ctr">
                       <a:solidFill>
                         <a:srgbClr val="CBD5E1"/>
@@ -11025,7 +10963,7 @@
                     <a:bodyPr/>
                     <a:lstStyle/>
                     <a:p>
-                      <a:pPr algn="l" indent="0" marL="0">
+                      <a:pPr marL="0" indent="0" algn="l">
                         <a:buNone/>
                       </a:pPr>
                       <a:r>
@@ -11039,7 +10977,7 @@
                       <a:endParaRPr lang="en-US" sz="900" dirty="0"/>
                     </a:p>
                   </a:txBody>
-                  <a:tcPr marL="91440" marR="91440" marT="45720" marB="45720">
+                  <a:tcPr>
                     <a:lnL w="5080" cap="flat" cmpd="sng" algn="ctr">
                       <a:solidFill>
                         <a:srgbClr val="CBD5E1"/>
@@ -11086,7 +11024,7 @@
                     <a:bodyPr/>
                     <a:lstStyle/>
                     <a:p>
-                      <a:pPr algn="l" indent="0" marL="0">
+                      <a:pPr marL="0" indent="0" algn="l">
                         <a:buNone/>
                       </a:pPr>
                       <a:r>
@@ -11100,7 +11038,7 @@
                       <a:endParaRPr lang="en-US" sz="900" dirty="0"/>
                     </a:p>
                   </a:txBody>
-                  <a:tcPr marL="91440" marR="91440" marT="45720" marB="45720">
+                  <a:tcPr>
                     <a:lnL w="5080" cap="flat" cmpd="sng" algn="ctr">
                       <a:solidFill>
                         <a:srgbClr val="CBD5E1"/>
@@ -11147,7 +11085,7 @@
                     <a:bodyPr/>
                     <a:lstStyle/>
                     <a:p>
-                      <a:pPr algn="l" indent="0" marL="0">
+                      <a:pPr marL="0" indent="0" algn="l">
                         <a:buNone/>
                       </a:pPr>
                       <a:r>
@@ -11161,7 +11099,7 @@
                       <a:endParaRPr lang="en-US" sz="900" dirty="0"/>
                     </a:p>
                   </a:txBody>
-                  <a:tcPr marL="91440" marR="91440" marT="45720" marB="45720">
+                  <a:tcPr>
                     <a:lnL w="5080" cap="flat" cmpd="sng" algn="ctr">
                       <a:solidFill>
                         <a:srgbClr val="CBD5E1"/>
@@ -11203,6 +11141,11 @@
                     </a:solidFill>
                   </a:tcPr>
                 </a:tc>
+                <a:extLst>
+                  <a:ext uri="{0D108BD9-81ED-4DB2-BD59-A6C34878D82A}">
+                    <a16:rowId xmlns:a16="http://schemas.microsoft.com/office/drawing/2014/main" val="10010"/>
+                  </a:ext>
+                </a:extLst>
               </a:tr>
               <a:tr h="253218">
                 <a:tc>
@@ -11210,7 +11153,7 @@
                     <a:bodyPr/>
                     <a:lstStyle/>
                     <a:p>
-                      <a:pPr algn="ctr" indent="0" marL="0">
+                      <a:pPr marL="0" indent="0" algn="ctr">
                         <a:buNone/>
                       </a:pPr>
                       <a:r>
@@ -11224,7 +11167,7 @@
                       <a:endParaRPr lang="en-US" sz="900" dirty="0"/>
                     </a:p>
                   </a:txBody>
-                  <a:tcPr marL="91440" marR="91440" marT="45720" marB="45720">
+                  <a:tcPr>
                     <a:lnL w="5080" cap="flat" cmpd="sng" algn="ctr">
                       <a:solidFill>
                         <a:srgbClr val="CBD5E1"/>
@@ -11271,7 +11214,7 @@
                     <a:bodyPr/>
                     <a:lstStyle/>
                     <a:p>
-                      <a:pPr algn="l" indent="0" marL="0">
+                      <a:pPr marL="0" indent="0" algn="l">
                         <a:buNone/>
                       </a:pPr>
                       <a:r>
@@ -11285,7 +11228,7 @@
                       <a:endParaRPr lang="en-US" sz="900" dirty="0"/>
                     </a:p>
                   </a:txBody>
-                  <a:tcPr marL="91440" marR="91440" marT="45720" marB="45720">
+                  <a:tcPr>
                     <a:lnL w="5080" cap="flat" cmpd="sng" algn="ctr">
                       <a:solidFill>
                         <a:srgbClr val="CBD5E1"/>
@@ -11332,7 +11275,7 @@
                     <a:bodyPr/>
                     <a:lstStyle/>
                     <a:p>
-                      <a:pPr algn="l" indent="0" marL="0">
+                      <a:pPr marL="0" indent="0" algn="l">
                         <a:buNone/>
                       </a:pPr>
                       <a:r>
@@ -11346,7 +11289,7 @@
                       <a:endParaRPr lang="en-US" sz="900" dirty="0"/>
                     </a:p>
                   </a:txBody>
-                  <a:tcPr marL="91440" marR="91440" marT="45720" marB="45720">
+                  <a:tcPr>
                     <a:lnL w="5080" cap="flat" cmpd="sng" algn="ctr">
                       <a:solidFill>
                         <a:srgbClr val="CBD5E1"/>
@@ -11393,7 +11336,7 @@
                     <a:bodyPr/>
                     <a:lstStyle/>
                     <a:p>
-                      <a:pPr algn="l" indent="0" marL="0">
+                      <a:pPr marL="0" indent="0" algn="l">
                         <a:buNone/>
                       </a:pPr>
                       <a:r>
@@ -11407,7 +11350,7 @@
                       <a:endParaRPr lang="en-US" sz="900" dirty="0"/>
                     </a:p>
                   </a:txBody>
-                  <a:tcPr marL="91440" marR="91440" marT="45720" marB="45720">
+                  <a:tcPr>
                     <a:lnL w="5080" cap="flat" cmpd="sng" algn="ctr">
                       <a:solidFill>
                         <a:srgbClr val="CBD5E1"/>
@@ -11449,6 +11392,11 @@
                     </a:solidFill>
                   </a:tcPr>
                 </a:tc>
+                <a:extLst>
+                  <a:ext uri="{0D108BD9-81ED-4DB2-BD59-A6C34878D82A}">
+                    <a16:rowId xmlns:a16="http://schemas.microsoft.com/office/drawing/2014/main" val="10011"/>
+                  </a:ext>
+                </a:extLst>
               </a:tr>
               <a:tr h="253218">
                 <a:tc>
@@ -11456,7 +11404,7 @@
                     <a:bodyPr/>
                     <a:lstStyle/>
                     <a:p>
-                      <a:pPr algn="ctr" indent="0" marL="0">
+                      <a:pPr marL="0" indent="0" algn="ctr">
                         <a:buNone/>
                       </a:pPr>
                       <a:r>
@@ -11470,7 +11418,7 @@
                       <a:endParaRPr lang="en-US" sz="900" dirty="0"/>
                     </a:p>
                   </a:txBody>
-                  <a:tcPr marL="91440" marR="91440" marT="45720" marB="45720">
+                  <a:tcPr>
                     <a:lnL w="5080" cap="flat" cmpd="sng" algn="ctr">
                       <a:solidFill>
                         <a:srgbClr val="CBD5E1"/>
@@ -11517,7 +11465,7 @@
                     <a:bodyPr/>
                     <a:lstStyle/>
                     <a:p>
-                      <a:pPr algn="l" indent="0" marL="0">
+                      <a:pPr marL="0" indent="0" algn="l">
                         <a:buNone/>
                       </a:pPr>
                       <a:r>
@@ -11531,7 +11479,7 @@
                       <a:endParaRPr lang="en-US" sz="900" dirty="0"/>
                     </a:p>
                   </a:txBody>
-                  <a:tcPr marL="91440" marR="91440" marT="45720" marB="45720">
+                  <a:tcPr>
                     <a:lnL w="5080" cap="flat" cmpd="sng" algn="ctr">
                       <a:solidFill>
                         <a:srgbClr val="CBD5E1"/>
@@ -11578,7 +11526,7 @@
                     <a:bodyPr/>
                     <a:lstStyle/>
                     <a:p>
-                      <a:pPr algn="l" indent="0" marL="0">
+                      <a:pPr marL="0" indent="0" algn="l">
                         <a:buNone/>
                       </a:pPr>
                       <a:r>
@@ -11592,7 +11540,7 @@
                       <a:endParaRPr lang="en-US" sz="900" dirty="0"/>
                     </a:p>
                   </a:txBody>
-                  <a:tcPr marL="91440" marR="91440" marT="45720" marB="45720">
+                  <a:tcPr>
                     <a:lnL w="5080" cap="flat" cmpd="sng" algn="ctr">
                       <a:solidFill>
                         <a:srgbClr val="CBD5E1"/>
@@ -11639,7 +11587,7 @@
                     <a:bodyPr/>
                     <a:lstStyle/>
                     <a:p>
-                      <a:pPr algn="l" indent="0" marL="0">
+                      <a:pPr marL="0" indent="0" algn="l">
                         <a:buNone/>
                       </a:pPr>
                       <a:r>
@@ -11653,7 +11601,7 @@
                       <a:endParaRPr lang="en-US" sz="900" dirty="0"/>
                     </a:p>
                   </a:txBody>
-                  <a:tcPr marL="91440" marR="91440" marT="45720" marB="45720">
+                  <a:tcPr>
                     <a:lnL w="5080" cap="flat" cmpd="sng" algn="ctr">
                       <a:solidFill>
                         <a:srgbClr val="CBD5E1"/>
@@ -11695,6 +11643,11 @@
                     </a:solidFill>
                   </a:tcPr>
                 </a:tc>
+                <a:extLst>
+                  <a:ext uri="{0D108BD9-81ED-4DB2-BD59-A6C34878D82A}">
+                    <a16:rowId xmlns:a16="http://schemas.microsoft.com/office/drawing/2014/main" val="10012"/>
+                  </a:ext>
+                </a:extLst>
               </a:tr>
             </a:tbl>
           </a:graphicData>
@@ -11721,7 +11674,7 @@
           <a:bodyPr wrap="square" lIns="0" tIns="0" rIns="0" bIns="0" rtlCol="0" anchor="ctr"/>
           <a:lstStyle/>
           <a:p>
-            <a:pPr indent="0" marL="0">
+            <a:pPr marL="0" indent="0">
               <a:buNone/>
             </a:pPr>
             <a:r>
@@ -11755,7 +11708,7 @@
           </a:solidFill>
           <a:ln/>
           <a:effectLst>
-            <a:outerShdw sx="100000" sy="100000" kx="0" ky="0" algn="bl" rotWithShape="0" blurRad="76200" dist="25400" dir="8100000">
+            <a:outerShdw blurRad="76200" dist="25400" dir="8100000" algn="bl" rotWithShape="0">
               <a:srgbClr val="000000">
                 <a:alpha val="8000"/>
               </a:srgbClr>
@@ -11784,7 +11737,7 @@
           <a:bodyPr wrap="square" lIns="0" tIns="0" rIns="0" bIns="0" rtlCol="0" anchor="ctr"/>
           <a:lstStyle/>
           <a:p>
-            <a:pPr indent="0" marL="0">
+            <a:pPr marL="0" indent="0">
               <a:buNone/>
             </a:pPr>
             <a:r>
@@ -11860,7 +11813,7 @@
           <a:bodyPr wrap="square" lIns="0" tIns="0" rIns="0" bIns="0" rtlCol="0" anchor="ctr"/>
           <a:lstStyle/>
           <a:p>
-            <a:pPr algn="ctr" indent="0" marL="0">
+            <a:pPr marL="0" indent="0" algn="ctr">
               <a:buNone/>
             </a:pPr>
             <a:r>
@@ -11896,7 +11849,7 @@
           <a:bodyPr wrap="square" lIns="0" tIns="0" rIns="0" bIns="0" rtlCol="0" anchor="ctr"/>
           <a:lstStyle/>
           <a:p>
-            <a:pPr indent="0" marL="0">
+            <a:pPr marL="0" indent="0">
               <a:buNone/>
             </a:pPr>
             <a:r>
@@ -11952,7 +11905,7 @@
           <a:bodyPr wrap="square" lIns="0" tIns="0" rIns="0" bIns="0" rtlCol="0" anchor="ctr"/>
           <a:lstStyle/>
           <a:p>
-            <a:pPr algn="ctr" indent="0" marL="0">
+            <a:pPr marL="0" indent="0" algn="ctr">
               <a:buNone/>
             </a:pPr>
             <a:r>
@@ -11988,7 +11941,7 @@
           <a:bodyPr wrap="square" lIns="0" tIns="0" rIns="0" bIns="0" rtlCol="0" anchor="ctr"/>
           <a:lstStyle/>
           <a:p>
-            <a:pPr indent="0" marL="0">
+            <a:pPr marL="0" indent="0">
               <a:buNone/>
             </a:pPr>
             <a:r>
@@ -12044,7 +11997,7 @@
           <a:bodyPr wrap="square" lIns="0" tIns="0" rIns="0" bIns="0" rtlCol="0" anchor="ctr"/>
           <a:lstStyle/>
           <a:p>
-            <a:pPr algn="ctr" indent="0" marL="0">
+            <a:pPr marL="0" indent="0" algn="ctr">
               <a:buNone/>
             </a:pPr>
             <a:r>
@@ -12080,7 +12033,7 @@
           <a:bodyPr wrap="square" lIns="0" tIns="0" rIns="0" bIns="0" rtlCol="0" anchor="ctr"/>
           <a:lstStyle/>
           <a:p>
-            <a:pPr indent="0" marL="0">
+            <a:pPr marL="0" indent="0">
               <a:buNone/>
             </a:pPr>
             <a:r>
@@ -12136,7 +12089,7 @@
           <a:bodyPr wrap="square" lIns="0" tIns="0" rIns="0" bIns="0" rtlCol="0" anchor="ctr"/>
           <a:lstStyle/>
           <a:p>
-            <a:pPr algn="ctr" indent="0" marL="0">
+            <a:pPr marL="0" indent="0" algn="ctr">
               <a:buNone/>
             </a:pPr>
             <a:r>
@@ -12172,7 +12125,7 @@
           <a:bodyPr wrap="square" lIns="0" tIns="0" rIns="0" bIns="0" rtlCol="0" anchor="ctr"/>
           <a:lstStyle/>
           <a:p>
-            <a:pPr indent="0" marL="0">
+            <a:pPr marL="0" indent="0">
               <a:buNone/>
             </a:pPr>
             <a:r>
@@ -12228,7 +12181,7 @@
           <a:bodyPr wrap="square" lIns="0" tIns="0" rIns="0" bIns="0" rtlCol="0" anchor="ctr"/>
           <a:lstStyle/>
           <a:p>
-            <a:pPr algn="ctr" indent="0" marL="0">
+            <a:pPr marL="0" indent="0" algn="ctr">
               <a:buNone/>
             </a:pPr>
             <a:r>
@@ -12264,7 +12217,7 @@
           <a:bodyPr wrap="square" lIns="0" tIns="0" rIns="0" bIns="0" rtlCol="0" anchor="ctr"/>
           <a:lstStyle/>
           <a:p>
-            <a:pPr indent="0" marL="0">
+            <a:pPr marL="0" indent="0">
               <a:buNone/>
             </a:pPr>
             <a:r>
@@ -12300,7 +12253,7 @@
           <a:bodyPr wrap="square" lIns="0" tIns="0" rIns="0" bIns="0" rtlCol="0" anchor="ctr"/>
           <a:lstStyle/>
           <a:p>
-            <a:pPr indent="0" marL="0">
+            <a:pPr marL="0" indent="0">
               <a:buNone/>
             </a:pPr>
             <a:r>
@@ -12331,6 +12284,7 @@
         <a:solidFill>
           <a:srgbClr val="F0F7FF"/>
         </a:solidFill>
+        <a:effectLst/>
       </p:bgPr>
     </p:bg>
     <p:spTree>
@@ -12408,7 +12362,7 @@
           <a:bodyPr wrap="square" lIns="0" tIns="0" rIns="0" bIns="0" rtlCol="0" anchor="ctr"/>
           <a:lstStyle/>
           <a:p>
-            <a:pPr indent="0" marL="0">
+            <a:pPr marL="0" indent="0">
               <a:buNone/>
             </a:pPr>
             <a:r>
@@ -12447,7 +12401,7 @@
           <a:bodyPr wrap="square" lIns="0" tIns="0" rIns="0" bIns="0" rtlCol="0" anchor="ctr"/>
           <a:lstStyle/>
           <a:p>
-            <a:pPr indent="0" marL="0">
+            <a:pPr marL="0" indent="0">
               <a:buNone/>
             </a:pPr>
             <a:r>
@@ -12486,7 +12440,7 @@
           <a:bodyPr wrap="square" rtlCol="0" anchor="ctr"/>
           <a:lstStyle/>
           <a:p>
-            <a:pPr algn="r" indent="0" marL="0">
+            <a:pPr marL="0" indent="0" algn="r">
               <a:buNone/>
             </a:pPr>
             <a:r>
@@ -12520,7 +12474,7 @@
           </a:solidFill>
           <a:ln/>
           <a:effectLst>
-            <a:outerShdw sx="100000" sy="100000" kx="0" ky="0" algn="bl" rotWithShape="0" blurRad="76200" dist="25400" dir="8100000">
+            <a:outerShdw blurRad="76200" dist="25400" dir="8100000" algn="bl" rotWithShape="0">
               <a:srgbClr val="000000">
                 <a:alpha val="8000"/>
               </a:srgbClr>
@@ -12569,7 +12523,7 @@
           <a:bodyPr wrap="square" lIns="0" tIns="0" rIns="0" bIns="0" rtlCol="0" anchor="ctr"/>
           <a:lstStyle/>
           <a:p>
-            <a:pPr indent="0" marL="0">
+            <a:pPr marL="0" indent="0">
               <a:buNone/>
             </a:pPr>
             <a:r>
@@ -12605,7 +12559,7 @@
           <a:bodyPr wrap="square" lIns="0" tIns="0" rIns="0" bIns="0" rtlCol="0" anchor="ctr"/>
           <a:lstStyle/>
           <a:p>
-            <a:pPr indent="0" marL="0">
+            <a:pPr marL="0" indent="0">
               <a:buNone/>
             </a:pPr>
             <a:r>
@@ -12641,7 +12595,7 @@
           <a:bodyPr wrap="square" lIns="0" tIns="0" rIns="0" bIns="0" rtlCol="0" anchor="ctr"/>
           <a:lstStyle/>
           <a:p>
-            <a:pPr algn="r" indent="0" marL="0">
+            <a:pPr marL="0" indent="0" algn="r">
               <a:buNone/>
             </a:pPr>
             <a:r>
@@ -12677,7 +12631,7 @@
           <a:bodyPr wrap="square" lIns="0" tIns="0" rIns="0" bIns="0" rtlCol="0" anchor="ctr"/>
           <a:lstStyle/>
           <a:p>
-            <a:pPr indent="0" marL="0">
+            <a:pPr marL="0" indent="0">
               <a:buNone/>
             </a:pPr>
             <a:r>
@@ -12713,7 +12667,7 @@
           <a:bodyPr wrap="square" lIns="0" tIns="0" rIns="0" bIns="0" rtlCol="0" anchor="ctr"/>
           <a:lstStyle/>
           <a:p>
-            <a:pPr algn="r" indent="0" marL="0">
+            <a:pPr marL="0" indent="0" algn="r">
               <a:buNone/>
             </a:pPr>
             <a:r>
@@ -12749,7 +12703,7 @@
           <a:bodyPr wrap="square" lIns="0" tIns="0" rIns="0" bIns="0" rtlCol="0" anchor="ctr"/>
           <a:lstStyle/>
           <a:p>
-            <a:pPr indent="0" marL="0">
+            <a:pPr marL="0" indent="0">
               <a:buNone/>
             </a:pPr>
             <a:r>
@@ -12785,7 +12739,7 @@
           <a:bodyPr wrap="square" lIns="0" tIns="0" rIns="0" bIns="0" rtlCol="0" anchor="ctr"/>
           <a:lstStyle/>
           <a:p>
-            <a:pPr algn="r" indent="0" marL="0">
+            <a:pPr marL="0" indent="0" algn="r">
               <a:buNone/>
             </a:pPr>
             <a:r>
@@ -12821,7 +12775,7 @@
           <a:bodyPr wrap="square" lIns="0" tIns="0" rIns="0" bIns="0" rtlCol="0" anchor="ctr"/>
           <a:lstStyle/>
           <a:p>
-            <a:pPr indent="0" marL="0">
+            <a:pPr marL="0" indent="0">
               <a:buNone/>
             </a:pPr>
             <a:r>
@@ -12857,7 +12811,7 @@
           <a:bodyPr wrap="square" lIns="0" tIns="0" rIns="0" bIns="0" rtlCol="0" anchor="ctr"/>
           <a:lstStyle/>
           <a:p>
-            <a:pPr algn="r" indent="0" marL="0">
+            <a:pPr marL="0" indent="0" algn="r">
               <a:buNone/>
             </a:pPr>
             <a:r>
@@ -12893,7 +12847,7 @@
           <a:bodyPr wrap="square" lIns="0" tIns="0" rIns="0" bIns="0" rtlCol="0" anchor="ctr"/>
           <a:lstStyle/>
           <a:p>
-            <a:pPr indent="0" marL="0">
+            <a:pPr marL="0" indent="0">
               <a:buNone/>
             </a:pPr>
             <a:r>
@@ -12929,7 +12883,7 @@
           <a:bodyPr wrap="square" lIns="0" tIns="0" rIns="0" bIns="0" rtlCol="0" anchor="ctr"/>
           <a:lstStyle/>
           <a:p>
-            <a:pPr algn="r" indent="0" marL="0">
+            <a:pPr marL="0" indent="0" algn="r">
               <a:buNone/>
             </a:pPr>
             <a:r>
@@ -12963,7 +12917,7 @@
           </a:solidFill>
           <a:ln/>
           <a:effectLst>
-            <a:outerShdw sx="100000" sy="100000" kx="0" ky="0" algn="bl" rotWithShape="0" blurRad="76200" dist="25400" dir="8100000">
+            <a:outerShdw blurRad="76200" dist="25400" dir="8100000" algn="bl" rotWithShape="0">
               <a:srgbClr val="000000">
                 <a:alpha val="8000"/>
               </a:srgbClr>
@@ -13012,7 +12966,7 @@
           <a:bodyPr wrap="square" lIns="0" tIns="0" rIns="0" bIns="0" rtlCol="0" anchor="ctr"/>
           <a:lstStyle/>
           <a:p>
-            <a:pPr indent="0" marL="0">
+            <a:pPr marL="0" indent="0">
               <a:buNone/>
             </a:pPr>
             <a:r>
@@ -13048,7 +13002,7 @@
           <a:bodyPr wrap="square" lIns="0" tIns="0" rIns="0" bIns="0" rtlCol="0" anchor="ctr"/>
           <a:lstStyle/>
           <a:p>
-            <a:pPr indent="0" marL="0">
+            <a:pPr marL="0" indent="0">
               <a:buNone/>
             </a:pPr>
             <a:r>
@@ -13084,7 +13038,7 @@
           <a:bodyPr wrap="square" lIns="0" tIns="0" rIns="0" bIns="0" rtlCol="0" anchor="ctr"/>
           <a:lstStyle/>
           <a:p>
-            <a:pPr algn="r" indent="0" marL="0">
+            <a:pPr marL="0" indent="0" algn="r">
               <a:buNone/>
             </a:pPr>
             <a:r>
@@ -13120,7 +13074,7 @@
           <a:bodyPr wrap="square" lIns="0" tIns="0" rIns="0" bIns="0" rtlCol="0" anchor="ctr"/>
           <a:lstStyle/>
           <a:p>
-            <a:pPr indent="0" marL="0">
+            <a:pPr marL="0" indent="0">
               <a:buNone/>
             </a:pPr>
             <a:r>
@@ -13156,7 +13110,7 @@
           <a:bodyPr wrap="square" lIns="0" tIns="0" rIns="0" bIns="0" rtlCol="0" anchor="ctr"/>
           <a:lstStyle/>
           <a:p>
-            <a:pPr algn="r" indent="0" marL="0">
+            <a:pPr marL="0" indent="0" algn="r">
               <a:buNone/>
             </a:pPr>
             <a:r>
@@ -13192,7 +13146,7 @@
           <a:bodyPr wrap="square" lIns="0" tIns="0" rIns="0" bIns="0" rtlCol="0" anchor="ctr"/>
           <a:lstStyle/>
           <a:p>
-            <a:pPr indent="0" marL="0">
+            <a:pPr marL="0" indent="0">
               <a:buNone/>
             </a:pPr>
             <a:r>
@@ -13228,7 +13182,7 @@
           <a:bodyPr wrap="square" lIns="0" tIns="0" rIns="0" bIns="0" rtlCol="0" anchor="ctr"/>
           <a:lstStyle/>
           <a:p>
-            <a:pPr algn="r" indent="0" marL="0">
+            <a:pPr marL="0" indent="0" algn="r">
               <a:buNone/>
             </a:pPr>
             <a:r>
@@ -13264,7 +13218,7 @@
           <a:bodyPr wrap="square" lIns="0" tIns="0" rIns="0" bIns="0" rtlCol="0" anchor="ctr"/>
           <a:lstStyle/>
           <a:p>
-            <a:pPr indent="0" marL="0">
+            <a:pPr marL="0" indent="0">
               <a:buNone/>
             </a:pPr>
             <a:r>
@@ -13300,7 +13254,7 @@
           <a:bodyPr wrap="square" lIns="0" tIns="0" rIns="0" bIns="0" rtlCol="0" anchor="ctr"/>
           <a:lstStyle/>
           <a:p>
-            <a:pPr algn="r" indent="0" marL="0">
+            <a:pPr marL="0" indent="0" algn="r">
               <a:buNone/>
             </a:pPr>
             <a:r>
@@ -13336,7 +13290,7 @@
           <a:bodyPr wrap="square" lIns="0" tIns="0" rIns="0" bIns="0" rtlCol="0" anchor="ctr"/>
           <a:lstStyle/>
           <a:p>
-            <a:pPr indent="0" marL="0">
+            <a:pPr marL="0" indent="0">
               <a:buNone/>
             </a:pPr>
             <a:r>
@@ -13372,7 +13326,7 @@
           <a:bodyPr wrap="square" lIns="0" tIns="0" rIns="0" bIns="0" rtlCol="0" anchor="ctr"/>
           <a:lstStyle/>
           <a:p>
-            <a:pPr algn="r" indent="0" marL="0">
+            <a:pPr marL="0" indent="0" algn="r">
               <a:buNone/>
             </a:pPr>
             <a:r>
@@ -13428,7 +13382,7 @@
           <a:bodyPr wrap="square" lIns="0" tIns="0" rIns="0" bIns="0" rtlCol="0" anchor="ctr"/>
           <a:lstStyle/>
           <a:p>
-            <a:pPr indent="0" marL="0">
+            <a:pPr marL="0" indent="0">
               <a:buNone/>
             </a:pPr>
             <a:r>
@@ -13464,7 +13418,7 @@
           <a:bodyPr wrap="square" lIns="0" tIns="0" rIns="0" bIns="0" rtlCol="0" anchor="ctr"/>
           <a:lstStyle/>
           <a:p>
-            <a:pPr indent="0" marL="0">
+            <a:pPr marL="0" indent="0">
               <a:buNone/>
             </a:pPr>
             <a:r>
@@ -13481,7 +13435,7 @@
             <a:endParaRPr lang="en-US" sz="1000" dirty="0"/>
           </a:p>
           <a:p>
-            <a:pPr indent="0" marL="0">
+            <a:pPr marL="0" indent="0">
               <a:buNone/>
             </a:pPr>
             <a:r>
@@ -13498,13 +13452,13 @@
             <a:endParaRPr lang="en-US" sz="1000" dirty="0"/>
           </a:p>
           <a:p>
-            <a:pPr indent="0" marL="0">
+            <a:pPr marL="0" indent="0">
               <a:buNone/>
             </a:pPr>
             <a:endParaRPr lang="en-US" sz="1000" dirty="0"/>
           </a:p>
           <a:p>
-            <a:pPr indent="0" marL="0">
+            <a:pPr marL="0" indent="0">
               <a:buNone/>
             </a:pPr>
             <a:r>
@@ -13521,7 +13475,7 @@
             <a:endParaRPr lang="en-US" sz="1000" dirty="0"/>
           </a:p>
           <a:p>
-            <a:pPr indent="0" marL="0">
+            <a:pPr marL="0" indent="0">
               <a:buNone/>
             </a:pPr>
             <a:r>
@@ -13555,6 +13509,7 @@
         <a:solidFill>
           <a:srgbClr val="F0F7FF"/>
         </a:solidFill>
+        <a:effectLst/>
       </p:bgPr>
     </p:bg>
     <p:spTree>
@@ -13632,7 +13587,7 @@
           <a:bodyPr wrap="square" lIns="0" tIns="0" rIns="0" bIns="0" rtlCol="0" anchor="ctr"/>
           <a:lstStyle/>
           <a:p>
-            <a:pPr indent="0" marL="0">
+            <a:pPr marL="0" indent="0">
               <a:buNone/>
             </a:pPr>
             <a:r>
@@ -13671,7 +13626,7 @@
           <a:bodyPr wrap="square" lIns="0" tIns="0" rIns="0" bIns="0" rtlCol="0" anchor="ctr"/>
           <a:lstStyle/>
           <a:p>
-            <a:pPr indent="0" marL="0">
+            <a:pPr marL="0" indent="0">
               <a:buNone/>
             </a:pPr>
             <a:r>
@@ -13710,7 +13665,7 @@
           <a:bodyPr wrap="square" rtlCol="0" anchor="ctr"/>
           <a:lstStyle/>
           <a:p>
-            <a:pPr algn="r" indent="0" marL="0">
+            <a:pPr marL="0" indent="0" algn="r">
               <a:buNone/>
             </a:pPr>
             <a:r>
@@ -13744,7 +13699,7 @@
           </a:solidFill>
           <a:ln/>
           <a:effectLst>
-            <a:outerShdw sx="100000" sy="100000" kx="0" ky="0" algn="bl" rotWithShape="0" blurRad="76200" dist="25400" dir="8100000">
+            <a:outerShdw blurRad="76200" dist="25400" dir="8100000" algn="bl" rotWithShape="0">
               <a:srgbClr val="000000">
                 <a:alpha val="8000"/>
               </a:srgbClr>
@@ -13793,7 +13748,7 @@
           <a:bodyPr wrap="square" lIns="0" tIns="0" rIns="0" bIns="0" rtlCol="0" anchor="ctr"/>
           <a:lstStyle/>
           <a:p>
-            <a:pPr algn="ctr" indent="0" marL="0">
+            <a:pPr marL="0" indent="0" algn="ctr">
               <a:buNone/>
             </a:pPr>
             <a:r>
@@ -13829,7 +13784,7 @@
           <a:bodyPr wrap="square" lIns="0" tIns="0" rIns="0" bIns="0" rtlCol="0" anchor="ctr"/>
           <a:lstStyle/>
           <a:p>
-            <a:pPr indent="0" marL="0">
+            <a:pPr marL="0" indent="0">
               <a:buNone/>
             </a:pPr>
             <a:r>
@@ -13887,7 +13842,7 @@
           <a:bodyPr wrap="square" lIns="0" tIns="0" rIns="0" bIns="0" rtlCol="0" anchor="ctr"/>
           <a:lstStyle/>
           <a:p>
-            <a:pPr algn="ctr" indent="0" marL="0">
+            <a:pPr marL="0" indent="0" algn="ctr">
               <a:buNone/>
             </a:pPr>
             <a:r>
@@ -13923,7 +13878,7 @@
           <a:bodyPr wrap="square" lIns="0" tIns="0" rIns="0" bIns="0" rtlCol="0" anchor="t"/>
           <a:lstStyle/>
           <a:p>
-            <a:pPr indent="0" marL="0">
+            <a:pPr marL="0" indent="0">
               <a:buNone/>
             </a:pPr>
             <a:r>
@@ -13957,7 +13912,7 @@
           </a:solidFill>
           <a:ln/>
           <a:effectLst>
-            <a:outerShdw sx="100000" sy="100000" kx="0" ky="0" algn="bl" rotWithShape="0" blurRad="76200" dist="25400" dir="8100000">
+            <a:outerShdw blurRad="76200" dist="25400" dir="8100000" algn="bl" rotWithShape="0">
               <a:srgbClr val="000000">
                 <a:alpha val="8000"/>
               </a:srgbClr>
@@ -14006,7 +13961,7 @@
           <a:bodyPr wrap="square" lIns="0" tIns="0" rIns="0" bIns="0" rtlCol="0" anchor="ctr"/>
           <a:lstStyle/>
           <a:p>
-            <a:pPr algn="ctr" indent="0" marL="0">
+            <a:pPr marL="0" indent="0" algn="ctr">
               <a:buNone/>
             </a:pPr>
             <a:r>
@@ -14042,7 +13997,7 @@
           <a:bodyPr wrap="square" lIns="0" tIns="0" rIns="0" bIns="0" rtlCol="0" anchor="ctr"/>
           <a:lstStyle/>
           <a:p>
-            <a:pPr indent="0" marL="0">
+            <a:pPr marL="0" indent="0">
               <a:buNone/>
             </a:pPr>
             <a:r>
@@ -14100,7 +14055,7 @@
           <a:bodyPr wrap="square" lIns="0" tIns="0" rIns="0" bIns="0" rtlCol="0" anchor="ctr"/>
           <a:lstStyle/>
           <a:p>
-            <a:pPr algn="ctr" indent="0" marL="0">
+            <a:pPr marL="0" indent="0" algn="ctr">
               <a:buNone/>
             </a:pPr>
             <a:r>
@@ -14136,7 +14091,7 @@
           <a:bodyPr wrap="square" lIns="0" tIns="0" rIns="0" bIns="0" rtlCol="0" anchor="t"/>
           <a:lstStyle/>
           <a:p>
-            <a:pPr indent="0" marL="0">
+            <a:pPr marL="0" indent="0">
               <a:buNone/>
             </a:pPr>
             <a:r>
@@ -14170,7 +14125,7 @@
           </a:solidFill>
           <a:ln/>
           <a:effectLst>
-            <a:outerShdw sx="100000" sy="100000" kx="0" ky="0" algn="bl" rotWithShape="0" blurRad="76200" dist="25400" dir="8100000">
+            <a:outerShdw blurRad="76200" dist="25400" dir="8100000" algn="bl" rotWithShape="0">
               <a:srgbClr val="000000">
                 <a:alpha val="8000"/>
               </a:srgbClr>
@@ -14219,7 +14174,7 @@
           <a:bodyPr wrap="square" lIns="0" tIns="0" rIns="0" bIns="0" rtlCol="0" anchor="ctr"/>
           <a:lstStyle/>
           <a:p>
-            <a:pPr algn="ctr" indent="0" marL="0">
+            <a:pPr marL="0" indent="0" algn="ctr">
               <a:buNone/>
             </a:pPr>
             <a:r>
@@ -14255,7 +14210,7 @@
           <a:bodyPr wrap="square" lIns="0" tIns="0" rIns="0" bIns="0" rtlCol="0" anchor="ctr"/>
           <a:lstStyle/>
           <a:p>
-            <a:pPr indent="0" marL="0">
+            <a:pPr marL="0" indent="0">
               <a:buNone/>
             </a:pPr>
             <a:r>
@@ -14313,7 +14268,7 @@
           <a:bodyPr wrap="square" lIns="0" tIns="0" rIns="0" bIns="0" rtlCol="0" anchor="ctr"/>
           <a:lstStyle/>
           <a:p>
-            <a:pPr algn="ctr" indent="0" marL="0">
+            <a:pPr marL="0" indent="0" algn="ctr">
               <a:buNone/>
             </a:pPr>
             <a:r>
@@ -14349,7 +14304,7 @@
           <a:bodyPr wrap="square" lIns="0" tIns="0" rIns="0" bIns="0" rtlCol="0" anchor="t"/>
           <a:lstStyle/>
           <a:p>
-            <a:pPr indent="0" marL="0">
+            <a:pPr marL="0" indent="0">
               <a:buNone/>
             </a:pPr>
             <a:r>
@@ -14383,7 +14338,7 @@
           </a:solidFill>
           <a:ln/>
           <a:effectLst>
-            <a:outerShdw sx="100000" sy="100000" kx="0" ky="0" algn="bl" rotWithShape="0" blurRad="76200" dist="25400" dir="8100000">
+            <a:outerShdw blurRad="76200" dist="25400" dir="8100000" algn="bl" rotWithShape="0">
               <a:srgbClr val="000000">
                 <a:alpha val="8000"/>
               </a:srgbClr>
@@ -14432,7 +14387,7 @@
           <a:bodyPr wrap="square" lIns="0" tIns="0" rIns="0" bIns="0" rtlCol="0" anchor="ctr"/>
           <a:lstStyle/>
           <a:p>
-            <a:pPr algn="ctr" indent="0" marL="0">
+            <a:pPr marL="0" indent="0" algn="ctr">
               <a:buNone/>
             </a:pPr>
             <a:r>
@@ -14468,7 +14423,7 @@
           <a:bodyPr wrap="square" lIns="0" tIns="0" rIns="0" bIns="0" rtlCol="0" anchor="ctr"/>
           <a:lstStyle/>
           <a:p>
-            <a:pPr indent="0" marL="0">
+            <a:pPr marL="0" indent="0">
               <a:buNone/>
             </a:pPr>
             <a:r>
@@ -14526,7 +14481,7 @@
           <a:bodyPr wrap="square" lIns="0" tIns="0" rIns="0" bIns="0" rtlCol="0" anchor="ctr"/>
           <a:lstStyle/>
           <a:p>
-            <a:pPr algn="ctr" indent="0" marL="0">
+            <a:pPr marL="0" indent="0" algn="ctr">
               <a:buNone/>
             </a:pPr>
             <a:r>
@@ -14562,7 +14517,7 @@
           <a:bodyPr wrap="square" lIns="0" tIns="0" rIns="0" bIns="0" rtlCol="0" anchor="t"/>
           <a:lstStyle/>
           <a:p>
-            <a:pPr indent="0" marL="0">
+            <a:pPr marL="0" indent="0">
               <a:buNone/>
             </a:pPr>
             <a:r>
@@ -14596,7 +14551,7 @@
           </a:solidFill>
           <a:ln/>
           <a:effectLst>
-            <a:outerShdw sx="100000" sy="100000" kx="0" ky="0" algn="bl" rotWithShape="0" blurRad="76200" dist="25400" dir="8100000">
+            <a:outerShdw blurRad="76200" dist="25400" dir="8100000" algn="bl" rotWithShape="0">
               <a:srgbClr val="000000">
                 <a:alpha val="8000"/>
               </a:srgbClr>
@@ -14645,7 +14600,7 @@
           <a:bodyPr wrap="square" lIns="0" tIns="0" rIns="0" bIns="0" rtlCol="0" anchor="ctr"/>
           <a:lstStyle/>
           <a:p>
-            <a:pPr algn="ctr" indent="0" marL="0">
+            <a:pPr marL="0" indent="0" algn="ctr">
               <a:buNone/>
             </a:pPr>
             <a:r>
@@ -14681,7 +14636,7 @@
           <a:bodyPr wrap="square" lIns="0" tIns="0" rIns="0" bIns="0" rtlCol="0" anchor="ctr"/>
           <a:lstStyle/>
           <a:p>
-            <a:pPr indent="0" marL="0">
+            <a:pPr marL="0" indent="0">
               <a:buNone/>
             </a:pPr>
             <a:r>
@@ -14739,7 +14694,7 @@
           <a:bodyPr wrap="square" lIns="0" tIns="0" rIns="0" bIns="0" rtlCol="0" anchor="ctr"/>
           <a:lstStyle/>
           <a:p>
-            <a:pPr algn="ctr" indent="0" marL="0">
+            <a:pPr marL="0" indent="0" algn="ctr">
               <a:buNone/>
             </a:pPr>
             <a:r>
@@ -14775,7 +14730,7 @@
           <a:bodyPr wrap="square" lIns="0" tIns="0" rIns="0" bIns="0" rtlCol="0" anchor="t"/>
           <a:lstStyle/>
           <a:p>
-            <a:pPr indent="0" marL="0">
+            <a:pPr marL="0" indent="0">
               <a:buNone/>
             </a:pPr>
             <a:r>
@@ -14809,7 +14764,7 @@
           </a:solidFill>
           <a:ln/>
           <a:effectLst>
-            <a:outerShdw sx="100000" sy="100000" kx="0" ky="0" algn="bl" rotWithShape="0" blurRad="76200" dist="25400" dir="8100000">
+            <a:outerShdw blurRad="76200" dist="25400" dir="8100000" algn="bl" rotWithShape="0">
               <a:srgbClr val="000000">
                 <a:alpha val="8000"/>
               </a:srgbClr>
@@ -14858,7 +14813,7 @@
           <a:bodyPr wrap="square" lIns="0" tIns="0" rIns="0" bIns="0" rtlCol="0" anchor="ctr"/>
           <a:lstStyle/>
           <a:p>
-            <a:pPr algn="ctr" indent="0" marL="0">
+            <a:pPr marL="0" indent="0" algn="ctr">
               <a:buNone/>
             </a:pPr>
             <a:r>
@@ -14894,7 +14849,7 @@
           <a:bodyPr wrap="square" lIns="0" tIns="0" rIns="0" bIns="0" rtlCol="0" anchor="ctr"/>
           <a:lstStyle/>
           <a:p>
-            <a:pPr indent="0" marL="0">
+            <a:pPr marL="0" indent="0">
               <a:buNone/>
             </a:pPr>
             <a:r>
@@ -14952,7 +14907,7 @@
           <a:bodyPr wrap="square" lIns="0" tIns="0" rIns="0" bIns="0" rtlCol="0" anchor="ctr"/>
           <a:lstStyle/>
           <a:p>
-            <a:pPr algn="ctr" indent="0" marL="0">
+            <a:pPr marL="0" indent="0" algn="ctr">
               <a:buNone/>
             </a:pPr>
             <a:r>
@@ -14988,7 +14943,7 @@
           <a:bodyPr wrap="square" lIns="0" tIns="0" rIns="0" bIns="0" rtlCol="0" anchor="t"/>
           <a:lstStyle/>
           <a:p>
-            <a:pPr indent="0" marL="0">
+            <a:pPr marL="0" indent="0">
               <a:buNone/>
             </a:pPr>
             <a:r>
@@ -15019,6 +14974,7 @@
         <a:solidFill>
           <a:srgbClr val="F0F7FF"/>
         </a:solidFill>
+        <a:effectLst/>
       </p:bgPr>
     </p:bg>
     <p:spTree>
@@ -15096,7 +15052,7 @@
           <a:bodyPr wrap="square" lIns="0" tIns="0" rIns="0" bIns="0" rtlCol="0" anchor="ctr"/>
           <a:lstStyle/>
           <a:p>
-            <a:pPr indent="0" marL="0">
+            <a:pPr marL="0" indent="0">
               <a:buNone/>
             </a:pPr>
             <a:r>
@@ -15135,7 +15091,7 @@
           <a:bodyPr wrap="square" lIns="0" tIns="0" rIns="0" bIns="0" rtlCol="0" anchor="ctr"/>
           <a:lstStyle/>
           <a:p>
-            <a:pPr indent="0" marL="0">
+            <a:pPr marL="0" indent="0">
               <a:buNone/>
             </a:pPr>
             <a:r>
@@ -15174,7 +15130,7 @@
           <a:bodyPr wrap="square" rtlCol="0" anchor="ctr"/>
           <a:lstStyle/>
           <a:p>
-            <a:pPr algn="r" indent="0" marL="0">
+            <a:pPr marL="0" indent="0" algn="r">
               <a:buNone/>
             </a:pPr>
             <a:r>
@@ -15208,7 +15164,7 @@
           </a:solidFill>
           <a:ln/>
           <a:effectLst>
-            <a:outerShdw sx="100000" sy="100000" kx="0" ky="0" algn="bl" rotWithShape="0" blurRad="76200" dist="25400" dir="8100000">
+            <a:outerShdw blurRad="76200" dist="25400" dir="8100000" algn="bl" rotWithShape="0">
               <a:srgbClr val="000000">
                 <a:alpha val="8000"/>
               </a:srgbClr>
@@ -15257,7 +15213,7 @@
           <a:bodyPr wrap="square" lIns="0" tIns="0" rIns="0" bIns="0" rtlCol="0" anchor="ctr"/>
           <a:lstStyle/>
           <a:p>
-            <a:pPr indent="0" marL="0">
+            <a:pPr marL="0" indent="0">
               <a:buNone/>
             </a:pPr>
             <a:r>
@@ -15293,7 +15249,7 @@
           <a:bodyPr wrap="square" lIns="0" tIns="0" rIns="0" bIns="0" rtlCol="0" anchor="ctr"/>
           <a:lstStyle/>
           <a:p>
-            <a:pPr indent="0" marL="0">
+            <a:pPr marL="0" indent="0">
               <a:buNone/>
             </a:pPr>
             <a:r>
@@ -15329,7 +15285,7 @@
           <a:bodyPr wrap="square" lIns="0" tIns="0" rIns="0" bIns="0" rtlCol="0" anchor="ctr"/>
           <a:lstStyle/>
           <a:p>
-            <a:pPr indent="0" marL="0">
+            <a:pPr marL="0" indent="0">
               <a:buNone/>
             </a:pPr>
             <a:r>
@@ -15365,7 +15321,7 @@
           <a:bodyPr wrap="square" lIns="0" tIns="0" rIns="0" bIns="0" rtlCol="0" anchor="ctr"/>
           <a:lstStyle/>
           <a:p>
-            <a:pPr indent="0" marL="0">
+            <a:pPr marL="0" indent="0">
               <a:buNone/>
             </a:pPr>
             <a:r>
@@ -15401,7 +15357,7 @@
           <a:bodyPr wrap="square" lIns="0" tIns="0" rIns="0" bIns="0" rtlCol="0" anchor="ctr"/>
           <a:lstStyle/>
           <a:p>
-            <a:pPr indent="0" marL="0">
+            <a:pPr marL="0" indent="0">
               <a:buNone/>
             </a:pPr>
             <a:r>
@@ -15435,7 +15391,7 @@
           </a:solidFill>
           <a:ln/>
           <a:effectLst>
-            <a:outerShdw sx="100000" sy="100000" kx="0" ky="0" algn="bl" rotWithShape="0" blurRad="76200" dist="25400" dir="8100000">
+            <a:outerShdw blurRad="76200" dist="25400" dir="8100000" algn="bl" rotWithShape="0">
               <a:srgbClr val="000000">
                 <a:alpha val="8000"/>
               </a:srgbClr>
@@ -15484,7 +15440,7 @@
           <a:bodyPr wrap="square" lIns="0" tIns="0" rIns="0" bIns="0" rtlCol="0" anchor="ctr"/>
           <a:lstStyle/>
           <a:p>
-            <a:pPr indent="0" marL="0">
+            <a:pPr marL="0" indent="0">
               <a:buNone/>
             </a:pPr>
             <a:r>
@@ -15520,7 +15476,7 @@
           <a:bodyPr wrap="square" lIns="0" tIns="0" rIns="0" bIns="0" rtlCol="0" anchor="ctr"/>
           <a:lstStyle/>
           <a:p>
-            <a:pPr indent="0" marL="0">
+            <a:pPr marL="0" indent="0">
               <a:buNone/>
             </a:pPr>
             <a:r>
@@ -15556,7 +15512,7 @@
           <a:bodyPr wrap="square" lIns="0" tIns="0" rIns="0" bIns="0" rtlCol="0" anchor="ctr"/>
           <a:lstStyle/>
           <a:p>
-            <a:pPr indent="0" marL="0">
+            <a:pPr marL="0" indent="0">
               <a:buNone/>
             </a:pPr>
             <a:r>
@@ -15592,7 +15548,7 @@
           <a:bodyPr wrap="square" lIns="0" tIns="0" rIns="0" bIns="0" rtlCol="0" anchor="ctr"/>
           <a:lstStyle/>
           <a:p>
-            <a:pPr indent="0" marL="0">
+            <a:pPr marL="0" indent="0">
               <a:buNone/>
             </a:pPr>
             <a:r>
@@ -15628,7 +15584,7 @@
           <a:bodyPr wrap="square" lIns="0" tIns="0" rIns="0" bIns="0" rtlCol="0" anchor="ctr"/>
           <a:lstStyle/>
           <a:p>
-            <a:pPr indent="0" marL="0">
+            <a:pPr marL="0" indent="0">
               <a:buNone/>
             </a:pPr>
             <a:r>
@@ -15662,7 +15618,7 @@
           </a:solidFill>
           <a:ln/>
           <a:effectLst>
-            <a:outerShdw sx="100000" sy="100000" kx="0" ky="0" algn="bl" rotWithShape="0" blurRad="76200" dist="25400" dir="8100000">
+            <a:outerShdw blurRad="76200" dist="25400" dir="8100000" algn="bl" rotWithShape="0">
               <a:srgbClr val="000000">
                 <a:alpha val="8000"/>
               </a:srgbClr>
@@ -15711,7 +15667,7 @@
           <a:bodyPr wrap="square" lIns="0" tIns="0" rIns="0" bIns="0" rtlCol="0" anchor="ctr"/>
           <a:lstStyle/>
           <a:p>
-            <a:pPr indent="0" marL="0">
+            <a:pPr marL="0" indent="0">
               <a:buNone/>
             </a:pPr>
             <a:r>
@@ -15747,7 +15703,7 @@
           <a:bodyPr wrap="square" lIns="0" tIns="0" rIns="0" bIns="0" rtlCol="0" anchor="ctr"/>
           <a:lstStyle/>
           <a:p>
-            <a:pPr indent="0" marL="0">
+            <a:pPr marL="0" indent="0">
               <a:buNone/>
             </a:pPr>
             <a:r>
@@ -15783,7 +15739,7 @@
           <a:bodyPr wrap="square" lIns="0" tIns="0" rIns="0" bIns="0" rtlCol="0" anchor="ctr"/>
           <a:lstStyle/>
           <a:p>
-            <a:pPr indent="0" marL="0">
+            <a:pPr marL="0" indent="0">
               <a:buNone/>
             </a:pPr>
             <a:r>
@@ -15819,7 +15775,7 @@
           <a:bodyPr wrap="square" lIns="0" tIns="0" rIns="0" bIns="0" rtlCol="0" anchor="ctr"/>
           <a:lstStyle/>
           <a:p>
-            <a:pPr indent="0" marL="0">
+            <a:pPr marL="0" indent="0">
               <a:buNone/>
             </a:pPr>
             <a:r>
@@ -15855,7 +15811,7 @@
           <a:bodyPr wrap="square" lIns="0" tIns="0" rIns="0" bIns="0" rtlCol="0" anchor="ctr"/>
           <a:lstStyle/>
           <a:p>
-            <a:pPr indent="0" marL="0">
+            <a:pPr marL="0" indent="0">
               <a:buNone/>
             </a:pPr>
             <a:r>
@@ -15889,7 +15845,7 @@
           </a:solidFill>
           <a:ln/>
           <a:effectLst>
-            <a:outerShdw sx="100000" sy="100000" kx="0" ky="0" algn="bl" rotWithShape="0" blurRad="76200" dist="25400" dir="8100000">
+            <a:outerShdw blurRad="76200" dist="25400" dir="8100000" algn="bl" rotWithShape="0">
               <a:srgbClr val="000000">
                 <a:alpha val="8000"/>
               </a:srgbClr>
@@ -15938,7 +15894,7 @@
           <a:bodyPr wrap="square" lIns="0" tIns="0" rIns="0" bIns="0" rtlCol="0" anchor="ctr"/>
           <a:lstStyle/>
           <a:p>
-            <a:pPr indent="0" marL="0">
+            <a:pPr marL="0" indent="0">
               <a:buNone/>
             </a:pPr>
             <a:r>
@@ -15974,7 +15930,7 @@
           <a:bodyPr wrap="square" lIns="0" tIns="0" rIns="0" bIns="0" rtlCol="0" anchor="ctr"/>
           <a:lstStyle/>
           <a:p>
-            <a:pPr indent="0" marL="0">
+            <a:pPr marL="0" indent="0">
               <a:buNone/>
             </a:pPr>
             <a:r>
@@ -16010,7 +15966,7 @@
           <a:bodyPr wrap="square" lIns="0" tIns="0" rIns="0" bIns="0" rtlCol="0" anchor="ctr"/>
           <a:lstStyle/>
           <a:p>
-            <a:pPr indent="0" marL="0">
+            <a:pPr marL="0" indent="0">
               <a:buNone/>
             </a:pPr>
             <a:r>
@@ -16046,7 +16002,7 @@
           <a:bodyPr wrap="square" lIns="0" tIns="0" rIns="0" bIns="0" rtlCol="0" anchor="ctr"/>
           <a:lstStyle/>
           <a:p>
-            <a:pPr indent="0" marL="0">
+            <a:pPr marL="0" indent="0">
               <a:buNone/>
             </a:pPr>
             <a:r>
@@ -16082,7 +16038,7 @@
           <a:bodyPr wrap="square" lIns="0" tIns="0" rIns="0" bIns="0" rtlCol="0" anchor="ctr"/>
           <a:lstStyle/>
           <a:p>
-            <a:pPr indent="0" marL="0">
+            <a:pPr marL="0" indent="0">
               <a:buNone/>
             </a:pPr>
             <a:r>
@@ -16398,4 +16354,299 @@
     </a:ext>
   </a:extLst>
 </a:theme>
+</file>
+
+<file path=ppt/theme/theme2.xml><?xml version="1.0" encoding="utf-8"?>
+<a:theme xmlns:a="http://schemas.openxmlformats.org/drawingml/2006/main" name="Office 主题​​">
+  <a:themeElements>
+    <a:clrScheme name="Office">
+      <a:dk1>
+        <a:sysClr val="windowText" lastClr="000000"/>
+      </a:dk1>
+      <a:lt1>
+        <a:sysClr val="window" lastClr="FFFFFF"/>
+      </a:lt1>
+      <a:dk2>
+        <a:srgbClr val="44546A"/>
+      </a:dk2>
+      <a:lt2>
+        <a:srgbClr val="E7E6E6"/>
+      </a:lt2>
+      <a:accent1>
+        <a:srgbClr val="4472C4"/>
+      </a:accent1>
+      <a:accent2>
+        <a:srgbClr val="ED7D31"/>
+      </a:accent2>
+      <a:accent3>
+        <a:srgbClr val="A5A5A5"/>
+      </a:accent3>
+      <a:accent4>
+        <a:srgbClr val="FFC000"/>
+      </a:accent4>
+      <a:accent5>
+        <a:srgbClr val="5B9BD5"/>
+      </a:accent5>
+      <a:accent6>
+        <a:srgbClr val="70AD47"/>
+      </a:accent6>
+      <a:hlink>
+        <a:srgbClr val="0563C1"/>
+      </a:hlink>
+      <a:folHlink>
+        <a:srgbClr val="954F72"/>
+      </a:folHlink>
+    </a:clrScheme>
+    <a:fontScheme name="Office">
+      <a:majorFont>
+        <a:latin typeface="等线 Light" panose="020F0302020204030204"/>
+        <a:ea typeface=""/>
+        <a:cs typeface=""/>
+        <a:font script="Jpan" typeface="游ゴシック Light"/>
+        <a:font script="Hang" typeface="맑은 고딕"/>
+        <a:font script="Hans" typeface="等线 Light"/>
+        <a:font script="Hant" typeface="新細明體"/>
+        <a:font script="Arab" typeface="Times New Roman"/>
+        <a:font script="Hebr" typeface="Times New Roman"/>
+        <a:font script="Thai" typeface="Angsana New"/>
+        <a:font script="Ethi" typeface="Nyala"/>
+        <a:font script="Beng" typeface="Vrinda"/>
+        <a:font script="Gujr" typeface="Shruti"/>
+        <a:font script="Khmr" typeface="MoolBoran"/>
+        <a:font script="Knda" typeface="Tunga"/>
+        <a:font script="Guru" typeface="Raavi"/>
+        <a:font script="Cans" typeface="Euphemia"/>
+        <a:font script="Cher" typeface="Plantagenet Cherokee"/>
+        <a:font script="Yiii" typeface="Microsoft Yi Baiti"/>
+        <a:font script="Tibt" typeface="Microsoft Himalaya"/>
+        <a:font script="Thaa" typeface="MV Boli"/>
+        <a:font script="Deva" typeface="Mangal"/>
+        <a:font script="Telu" typeface="Gautami"/>
+        <a:font script="Taml" typeface="Latha"/>
+        <a:font script="Syrc" typeface="Estrangelo Edessa"/>
+        <a:font script="Orya" typeface="Kalinga"/>
+        <a:font script="Mlym" typeface="Kartika"/>
+        <a:font script="Laoo" typeface="DokChampa"/>
+        <a:font script="Sinh" typeface="Iskoola Pota"/>
+        <a:font script="Mong" typeface="Mongolian Baiti"/>
+        <a:font script="Viet" typeface="Times New Roman"/>
+        <a:font script="Uigh" typeface="Microsoft Uighur"/>
+        <a:font script="Geor" typeface="Sylfaen"/>
+        <a:font script="Armn" typeface="Arial"/>
+        <a:font script="Bugi" typeface="Leelawadee UI"/>
+        <a:font script="Bopo" typeface="Microsoft JhengHei"/>
+        <a:font script="Java" typeface="Javanese Text"/>
+        <a:font script="Lisu" typeface="Segoe UI"/>
+        <a:font script="Mymr" typeface="Myanmar Text"/>
+        <a:font script="Nkoo" typeface="Ebrima"/>
+        <a:font script="Olck" typeface="Nirmala UI"/>
+        <a:font script="Osma" typeface="Ebrima"/>
+        <a:font script="Phag" typeface="Phagspa"/>
+        <a:font script="Syrn" typeface="Estrangelo Edessa"/>
+        <a:font script="Syrj" typeface="Estrangelo Edessa"/>
+        <a:font script="Syre" typeface="Estrangelo Edessa"/>
+        <a:font script="Sora" typeface="Nirmala UI"/>
+        <a:font script="Tale" typeface="Microsoft Tai Le"/>
+        <a:font script="Talu" typeface="Microsoft New Tai Lue"/>
+        <a:font script="Tfng" typeface="Ebrima"/>
+      </a:majorFont>
+      <a:minorFont>
+        <a:latin typeface="等线" panose="020F0502020204030204"/>
+        <a:ea typeface=""/>
+        <a:cs typeface=""/>
+        <a:font script="Jpan" typeface="游ゴシック"/>
+        <a:font script="Hang" typeface="맑은 고딕"/>
+        <a:font script="Hans" typeface="等线"/>
+        <a:font script="Hant" typeface="新細明體"/>
+        <a:font script="Arab" typeface="Arial"/>
+        <a:font script="Hebr" typeface="Arial"/>
+        <a:font script="Thai" typeface="Cordia New"/>
+        <a:font script="Ethi" typeface="Nyala"/>
+        <a:font script="Beng" typeface="Vrinda"/>
+        <a:font script="Gujr" typeface="Shruti"/>
+        <a:font script="Khmr" typeface="DaunPenh"/>
+        <a:font script="Knda" typeface="Tunga"/>
+        <a:font script="Guru" typeface="Raavi"/>
+        <a:font script="Cans" typeface="Euphemia"/>
+        <a:font script="Cher" typeface="Plantagenet Cherokee"/>
+        <a:font script="Yiii" typeface="Microsoft Yi Baiti"/>
+        <a:font script="Tibt" typeface="Microsoft Himalaya"/>
+        <a:font script="Thaa" typeface="MV Boli"/>
+        <a:font script="Deva" typeface="Mangal"/>
+        <a:font script="Telu" typeface="Gautami"/>
+        <a:font script="Taml" typeface="Latha"/>
+        <a:font script="Syrc" typeface="Estrangelo Edessa"/>
+        <a:font script="Orya" typeface="Kalinga"/>
+        <a:font script="Mlym" typeface="Kartika"/>
+        <a:font script="Laoo" typeface="DokChampa"/>
+        <a:font script="Sinh" typeface="Iskoola Pota"/>
+        <a:font script="Mong" typeface="Mongolian Baiti"/>
+        <a:font script="Viet" typeface="Arial"/>
+        <a:font script="Uigh" typeface="Microsoft Uighur"/>
+        <a:font script="Geor" typeface="Sylfaen"/>
+        <a:font script="Armn" typeface="Arial"/>
+        <a:font script="Bugi" typeface="Leelawadee UI"/>
+        <a:font script="Bopo" typeface="Microsoft JhengHei"/>
+        <a:font script="Java" typeface="Javanese Text"/>
+        <a:font script="Lisu" typeface="Segoe UI"/>
+        <a:font script="Mymr" typeface="Myanmar Text"/>
+        <a:font script="Nkoo" typeface="Ebrima"/>
+        <a:font script="Olck" typeface="Nirmala UI"/>
+        <a:font script="Osma" typeface="Ebrima"/>
+        <a:font script="Phag" typeface="Phagspa"/>
+        <a:font script="Syrn" typeface="Estrangelo Edessa"/>
+        <a:font script="Syrj" typeface="Estrangelo Edessa"/>
+        <a:font script="Syre" typeface="Estrangelo Edessa"/>
+        <a:font script="Sora" typeface="Nirmala UI"/>
+        <a:font script="Tale" typeface="Microsoft Tai Le"/>
+        <a:font script="Talu" typeface="Microsoft New Tai Lue"/>
+        <a:font script="Tfng" typeface="Ebrima"/>
+      </a:minorFont>
+    </a:fontScheme>
+    <a:fmtScheme name="Office">
+      <a:fillStyleLst>
+        <a:solidFill>
+          <a:schemeClr val="phClr"/>
+        </a:solidFill>
+        <a:gradFill rotWithShape="1">
+          <a:gsLst>
+            <a:gs pos="0">
+              <a:schemeClr val="phClr">
+                <a:lumMod val="110000"/>
+                <a:satMod val="105000"/>
+                <a:tint val="67000"/>
+              </a:schemeClr>
+            </a:gs>
+            <a:gs pos="50000">
+              <a:schemeClr val="phClr">
+                <a:lumMod val="105000"/>
+                <a:satMod val="103000"/>
+                <a:tint val="73000"/>
+              </a:schemeClr>
+            </a:gs>
+            <a:gs pos="100000">
+              <a:schemeClr val="phClr">
+                <a:lumMod val="105000"/>
+                <a:satMod val="109000"/>
+                <a:tint val="81000"/>
+              </a:schemeClr>
+            </a:gs>
+          </a:gsLst>
+          <a:lin ang="5400000" scaled="0"/>
+        </a:gradFill>
+        <a:gradFill rotWithShape="1">
+          <a:gsLst>
+            <a:gs pos="0">
+              <a:schemeClr val="phClr">
+                <a:satMod val="103000"/>
+                <a:lumMod val="102000"/>
+                <a:tint val="94000"/>
+              </a:schemeClr>
+            </a:gs>
+            <a:gs pos="50000">
+              <a:schemeClr val="phClr">
+                <a:satMod val="110000"/>
+                <a:lumMod val="100000"/>
+                <a:shade val="100000"/>
+              </a:schemeClr>
+            </a:gs>
+            <a:gs pos="100000">
+              <a:schemeClr val="phClr">
+                <a:lumMod val="99000"/>
+                <a:satMod val="120000"/>
+                <a:shade val="78000"/>
+              </a:schemeClr>
+            </a:gs>
+          </a:gsLst>
+          <a:lin ang="5400000" scaled="0"/>
+        </a:gradFill>
+      </a:fillStyleLst>
+      <a:lnStyleLst>
+        <a:ln w="6350" cap="flat" cmpd="sng" algn="ctr">
+          <a:solidFill>
+            <a:schemeClr val="phClr"/>
+          </a:solidFill>
+          <a:prstDash val="solid"/>
+          <a:miter lim="800000"/>
+        </a:ln>
+        <a:ln w="12700" cap="flat" cmpd="sng" algn="ctr">
+          <a:solidFill>
+            <a:schemeClr val="phClr"/>
+          </a:solidFill>
+          <a:prstDash val="solid"/>
+          <a:miter lim="800000"/>
+        </a:ln>
+        <a:ln w="19050" cap="flat" cmpd="sng" algn="ctr">
+          <a:solidFill>
+            <a:schemeClr val="phClr"/>
+          </a:solidFill>
+          <a:prstDash val="solid"/>
+          <a:miter lim="800000"/>
+        </a:ln>
+      </a:lnStyleLst>
+      <a:effectStyleLst>
+        <a:effectStyle>
+          <a:effectLst/>
+        </a:effectStyle>
+        <a:effectStyle>
+          <a:effectLst/>
+        </a:effectStyle>
+        <a:effectStyle>
+          <a:effectLst>
+            <a:outerShdw blurRad="57150" dist="19050" dir="5400000" algn="ctr" rotWithShape="0">
+              <a:srgbClr val="000000">
+                <a:alpha val="63000"/>
+              </a:srgbClr>
+            </a:outerShdw>
+          </a:effectLst>
+        </a:effectStyle>
+      </a:effectStyleLst>
+      <a:bgFillStyleLst>
+        <a:solidFill>
+          <a:schemeClr val="phClr"/>
+        </a:solidFill>
+        <a:solidFill>
+          <a:schemeClr val="phClr">
+            <a:tint val="95000"/>
+            <a:satMod val="170000"/>
+          </a:schemeClr>
+        </a:solidFill>
+        <a:gradFill rotWithShape="1">
+          <a:gsLst>
+            <a:gs pos="0">
+              <a:schemeClr val="phClr">
+                <a:tint val="93000"/>
+                <a:satMod val="150000"/>
+                <a:shade val="98000"/>
+                <a:lumMod val="102000"/>
+              </a:schemeClr>
+            </a:gs>
+            <a:gs pos="50000">
+              <a:schemeClr val="phClr">
+                <a:tint val="98000"/>
+                <a:satMod val="130000"/>
+                <a:shade val="90000"/>
+                <a:lumMod val="103000"/>
+              </a:schemeClr>
+            </a:gs>
+            <a:gs pos="100000">
+              <a:schemeClr val="phClr">
+                <a:shade val="63000"/>
+                <a:satMod val="120000"/>
+              </a:schemeClr>
+            </a:gs>
+          </a:gsLst>
+          <a:lin ang="5400000" scaled="0"/>
+        </a:gradFill>
+      </a:bgFillStyleLst>
+    </a:fmtScheme>
+  </a:themeElements>
+  <a:objectDefaults/>
+  <a:extraClrSchemeLst/>
+  <a:extLst>
+    <a:ext uri="{05A4C25C-085E-4340-85A3-A5531E510DB2}">
+      <thm15:themeFamily xmlns:thm15="http://schemas.microsoft.com/office/thememl/2012/main" name="Office Theme" id="{62F939B6-93AF-4DB8-9C6B-D6C7DFDC589F}" vid="{4A3C46E8-61CC-4603-A589-7422A47A8E4A}"/>
+    </a:ext>
+  </a:extLst>
+</a:theme>
 </file>